--- a/Conflict_Trade_Explorer.pptx
+++ b/Conflict_Trade_Explorer.pptx
@@ -149,7 +149,7 @@
     </p:spTree>
     <p:extLst>
       <p:ext uri="{BB962C8B-B14F-4D97-AF65-F5344CB8AC3E}">
-        <p14:creationId xmlns:p14="http://schemas.microsoft.com/office/powerpoint/2010/main" val="3814256095"/>
+        <p14:creationId xmlns:p14="http://schemas.microsoft.com/office/powerpoint/2010/main" val="3078323124"/>
       </p:ext>
     </p:extLst>
   </p:cSld>
@@ -2003,8 +2003,8 @@
         </p:nvSpPr>
         <p:spPr>
           <a:xfrm>
-            <a:off x="457200" y="594360"/>
-            <a:ext cx="8229600" cy="914400"/>
+            <a:off x="457200" y="566928"/>
+            <a:ext cx="4572000" cy="960120"/>
           </a:xfrm>
           <a:prstGeom prst="rect">
             <a:avLst/>
@@ -2020,28 +2020,28 @@
               <a:buNone/>
             </a:pPr>
             <a:r>
-              <a:rPr lang="en-US" sz="3000" b="1" dirty="0">
+              <a:rPr lang="en-US" sz="3400" b="1" dirty="0">
                 <a:solidFill>
                   <a:srgbClr val="FFFFFF"/>
                 </a:solidFill>
               </a:rPr>
-              <a:t>Now Marco switches</a:t>
-            </a:r>
-            <a:endParaRPr lang="en-US" sz="3000" dirty="0"/>
+              <a:t>Same tool.</a:t>
+            </a:r>
+            <a:endParaRPr lang="en-US" sz="3400" dirty="0"/>
           </a:p>
           <a:p>
             <a:pPr marL="0" indent="0">
               <a:buNone/>
             </a:pPr>
             <a:r>
-              <a:rPr lang="en-US" sz="3000" b="1" dirty="0">
+              <a:rPr lang="en-US" sz="3400" b="1" dirty="0">
                 <a:solidFill>
                   <a:srgbClr val="FFFFFF"/>
                 </a:solidFill>
               </a:rPr>
-              <a:t>to the state view.</a:t>
-            </a:r>
-            <a:endParaRPr lang="en-US" sz="3000" dirty="0"/>
+              <a:t>New hypothesis.</a:t>
+            </a:r>
+            <a:endParaRPr lang="en-US" sz="3400" dirty="0"/>
           </a:p>
         </p:txBody>
       </p:sp>
@@ -2053,8 +2053,126 @@
         </p:nvSpPr>
         <p:spPr>
           <a:xfrm>
-            <a:off x="411480" y="1691640"/>
-            <a:ext cx="2743200" cy="2926080"/>
+            <a:off x="411480" y="1664208"/>
+            <a:ext cx="8321040" cy="1325880"/>
+          </a:xfrm>
+          <a:prstGeom prst="rect">
+            <a:avLst/>
+          </a:prstGeom>
+          <a:solidFill>
+            <a:srgbClr val="1C3A52"/>
+          </a:solidFill>
+          <a:ln w="12700">
+            <a:solidFill>
+              <a:srgbClr val="1B998B"/>
+            </a:solidFill>
+            <a:prstDash val="solid"/>
+          </a:ln>
+        </p:spPr>
+        <p:txBody>
+          <a:bodyPr/>
+          <a:lstStyle/>
+          <a:p>
+            <a:endParaRPr lang="de-CH"/>
+          </a:p>
+        </p:txBody>
+      </p:sp>
+      <p:sp>
+        <p:nvSpPr>
+          <p:cNvPr id="6" name="Text 4"/>
+          <p:cNvSpPr/>
+          <p:nvPr/>
+        </p:nvSpPr>
+        <p:spPr>
+          <a:xfrm>
+            <a:off x="594360" y="1755648"/>
+            <a:ext cx="2743200" cy="256032"/>
+          </a:xfrm>
+          <a:prstGeom prst="rect">
+            <a:avLst/>
+          </a:prstGeom>
+          <a:noFill/>
+          <a:ln/>
+        </p:spPr>
+        <p:txBody>
+          <a:bodyPr wrap="square" rtlCol="0" anchor="ctr"/>
+          <a:lstStyle/>
+          <a:p>
+            <a:pPr marL="0" indent="0">
+              <a:buNone/>
+            </a:pPr>
+            <a:r>
+              <a:rPr lang="en-US" sz="900" b="1" kern="0" spc="200" dirty="0">
+                <a:solidFill>
+                  <a:srgbClr val="1B998B"/>
+                </a:solidFill>
+              </a:rPr>
+              <a:t>ACT 2  ·  IND vs. PAK</a:t>
+            </a:r>
+            <a:endParaRPr lang="en-US" sz="900" dirty="0"/>
+          </a:p>
+        </p:txBody>
+      </p:sp>
+      <p:sp>
+        <p:nvSpPr>
+          <p:cNvPr id="7" name="Text 5"/>
+          <p:cNvSpPr/>
+          <p:nvPr/>
+        </p:nvSpPr>
+        <p:spPr>
+          <a:xfrm>
+            <a:off x="594360" y="2029968"/>
+            <a:ext cx="7863840" cy="804672"/>
+          </a:xfrm>
+          <a:prstGeom prst="rect">
+            <a:avLst/>
+          </a:prstGeom>
+          <a:noFill/>
+          <a:ln/>
+        </p:spPr>
+        <p:txBody>
+          <a:bodyPr wrap="square" rtlCol="0" anchor="ctr"/>
+          <a:lstStyle/>
+          <a:p>
+            <a:pPr marL="0" indent="0">
+              <a:buNone/>
+            </a:pPr>
+            <a:r>
+              <a:rPr lang="en-US" sz="1600" i="1" dirty="0">
+                <a:solidFill>
+                  <a:srgbClr val="FFFFFF"/>
+                </a:solidFill>
+              </a:rPr>
+              <a:t>“India and Pakistan have fought three wars. Both are ramping up military spending in the 1990s.</a:t>
+            </a:r>
+            <a:endParaRPr lang="en-US" sz="1600" dirty="0"/>
+          </a:p>
+          <a:p>
+            <a:pPr marL="0" indent="0">
+              <a:buNone/>
+            </a:pPr>
+            <a:r>
+              <a:rPr lang="en-US" sz="1600" i="1" dirty="0">
+                <a:solidFill>
+                  <a:srgbClr val="FFFFFF"/>
+                </a:solidFill>
+              </a:rPr>
+              <a:t>Does trade between them die too or does something unexpected happen?”</a:t>
+            </a:r>
+            <a:endParaRPr lang="en-US" sz="1600" dirty="0"/>
+          </a:p>
+        </p:txBody>
+      </p:sp>
+      <p:sp>
+        <p:nvSpPr>
+          <p:cNvPr id="8" name="Shape 6"/>
+          <p:cNvSpPr/>
+          <p:nvPr/>
+        </p:nvSpPr>
+        <p:spPr>
+          <a:xfrm>
+            <a:off x="411480" y="3182112"/>
+            <a:ext cx="2651760" cy="1691640"/>
           </a:xfrm>
           <a:prstGeom prst="rect">
             <a:avLst/>
@@ -2086,14 +2204,14 @@
       </p:sp>
       <p:sp>
         <p:nvSpPr>
-          <p:cNvPr id="6" name="Text 4"/>
-          <p:cNvSpPr/>
-          <p:nvPr/>
-        </p:nvSpPr>
-        <p:spPr>
-          <a:xfrm>
-            <a:off x="411480" y="1920240"/>
-            <a:ext cx="2743200" cy="1280160"/>
+          <p:cNvPr id="9" name="Text 7"/>
+          <p:cNvSpPr/>
+          <p:nvPr/>
+        </p:nvSpPr>
+        <p:spPr>
+          <a:xfrm>
+            <a:off x="411480" y="3246120"/>
+            <a:ext cx="2651760" cy="868680"/>
           </a:xfrm>
           <a:prstGeom prst="rect">
             <a:avLst/>
@@ -2109,27 +2227,27 @@
               <a:buNone/>
             </a:pPr>
             <a:r>
-              <a:rPr lang="en-US" sz="6400" b="1" dirty="0">
+              <a:rPr lang="en-US" sz="5200" b="1" dirty="0">
                 <a:solidFill>
                   <a:srgbClr val="E8C547"/>
                 </a:solidFill>
               </a:rPr>
               <a:t>3</a:t>
             </a:r>
-            <a:endParaRPr lang="en-US" sz="6400" dirty="0"/>
-          </a:p>
-        </p:txBody>
-      </p:sp>
-      <p:sp>
-        <p:nvSpPr>
-          <p:cNvPr id="7" name="Text 5"/>
-          <p:cNvSpPr/>
-          <p:nvPr/>
-        </p:nvSpPr>
-        <p:spPr>
-          <a:xfrm>
-            <a:off x="594360" y="3246120"/>
-            <a:ext cx="2377440" cy="1097280"/>
+            <a:endParaRPr lang="en-US" sz="5200" dirty="0"/>
+          </a:p>
+        </p:txBody>
+      </p:sp>
+      <p:sp>
+        <p:nvSpPr>
+          <p:cNvPr id="10" name="Text 8"/>
+          <p:cNvSpPr/>
+          <p:nvPr/>
+        </p:nvSpPr>
+        <p:spPr>
+          <a:xfrm>
+            <a:off x="548640" y="4133088"/>
+            <a:ext cx="2377440" cy="640080"/>
           </a:xfrm>
           <a:prstGeom prst="rect">
             <a:avLst/>
@@ -2145,41 +2263,41 @@
               <a:buNone/>
             </a:pPr>
             <a:r>
-              <a:rPr lang="en-US" sz="1400" dirty="0">
+              <a:rPr lang="en-US" sz="1200" dirty="0">
                 <a:solidFill>
                   <a:srgbClr val="8FA3B1"/>
                 </a:solidFill>
               </a:rPr>
               <a:t>Wars fought</a:t>
             </a:r>
-            <a:endParaRPr lang="en-US" sz="1400" dirty="0"/>
+            <a:endParaRPr lang="en-US" sz="1200" dirty="0"/>
           </a:p>
           <a:p>
             <a:pPr marL="0" indent="0" algn="ctr">
               <a:buNone/>
             </a:pPr>
             <a:r>
-              <a:rPr lang="en-US" sz="1400" dirty="0">
+              <a:rPr lang="en-US" sz="1200" dirty="0">
                 <a:solidFill>
                   <a:srgbClr val="8FA3B1"/>
                 </a:solidFill>
               </a:rPr>
               <a:t>1947 · 1965 · 1971</a:t>
             </a:r>
-            <a:endParaRPr lang="en-US" sz="1400" dirty="0"/>
-          </a:p>
-        </p:txBody>
-      </p:sp>
-      <p:sp>
-        <p:nvSpPr>
-          <p:cNvPr id="8" name="Shape 6"/>
-          <p:cNvSpPr/>
-          <p:nvPr/>
-        </p:nvSpPr>
-        <p:spPr>
-          <a:xfrm>
-            <a:off x="3291840" y="1691640"/>
-            <a:ext cx="2743200" cy="2926080"/>
+            <a:endParaRPr lang="en-US" sz="1200" dirty="0"/>
+          </a:p>
+        </p:txBody>
+      </p:sp>
+      <p:sp>
+        <p:nvSpPr>
+          <p:cNvPr id="11" name="Shape 9"/>
+          <p:cNvSpPr/>
+          <p:nvPr/>
+        </p:nvSpPr>
+        <p:spPr>
+          <a:xfrm>
+            <a:off x="3264408" y="3182112"/>
+            <a:ext cx="2651760" cy="1691640"/>
           </a:xfrm>
           <a:prstGeom prst="rect">
             <a:avLst/>
@@ -2211,14 +2329,14 @@
       </p:sp>
       <p:sp>
         <p:nvSpPr>
-          <p:cNvPr id="9" name="Text 7"/>
-          <p:cNvSpPr/>
-          <p:nvPr/>
-        </p:nvSpPr>
-        <p:spPr>
-          <a:xfrm>
-            <a:off x="3291840" y="1920240"/>
-            <a:ext cx="2743200" cy="1280160"/>
+          <p:cNvPr id="12" name="Text 10"/>
+          <p:cNvSpPr/>
+          <p:nvPr/>
+        </p:nvSpPr>
+        <p:spPr>
+          <a:xfrm>
+            <a:off x="3264408" y="3246120"/>
+            <a:ext cx="2651760" cy="868680"/>
           </a:xfrm>
           <a:prstGeom prst="rect">
             <a:avLst/>
@@ -2234,27 +2352,27 @@
               <a:buNone/>
             </a:pPr>
             <a:r>
-              <a:rPr lang="en-US" sz="6400" b="1" dirty="0">
+              <a:rPr lang="en-US" sz="5200" b="1" dirty="0">
                 <a:solidFill>
                   <a:srgbClr val="1B998B"/>
                 </a:solidFill>
               </a:rPr>
               <a:t>~70%</a:t>
             </a:r>
-            <a:endParaRPr lang="en-US" sz="6400" dirty="0"/>
-          </a:p>
-        </p:txBody>
-      </p:sp>
-      <p:sp>
-        <p:nvSpPr>
-          <p:cNvPr id="10" name="Text 8"/>
-          <p:cNvSpPr/>
-          <p:nvPr/>
-        </p:nvSpPr>
-        <p:spPr>
-          <a:xfrm>
-            <a:off x="3474720" y="3246120"/>
-            <a:ext cx="2377440" cy="1097280"/>
+            <a:endParaRPr lang="en-US" sz="5200" dirty="0"/>
+          </a:p>
+        </p:txBody>
+      </p:sp>
+      <p:sp>
+        <p:nvSpPr>
+          <p:cNvPr id="13" name="Text 11"/>
+          <p:cNvSpPr/>
+          <p:nvPr/>
+        </p:nvSpPr>
+        <p:spPr>
+          <a:xfrm>
+            <a:off x="3401568" y="4133088"/>
+            <a:ext cx="2377440" cy="640080"/>
           </a:xfrm>
           <a:prstGeom prst="rect">
             <a:avLst/>
@@ -2270,41 +2388,41 @@
               <a:buNone/>
             </a:pPr>
             <a:r>
-              <a:rPr lang="en-US" sz="1400" dirty="0">
+              <a:rPr lang="en-US" sz="1200" dirty="0">
                 <a:solidFill>
                   <a:srgbClr val="8FA3B1"/>
                 </a:solidFill>
               </a:rPr>
-              <a:t>Mil. spend increase</a:t>
-            </a:r>
-            <a:endParaRPr lang="en-US" sz="1400" dirty="0"/>
+              <a:t>India mil. spend</a:t>
+            </a:r>
+            <a:endParaRPr lang="en-US" sz="1200" dirty="0"/>
           </a:p>
           <a:p>
             <a:pPr marL="0" indent="0" algn="ctr">
               <a:buNone/>
             </a:pPr>
             <a:r>
-              <a:rPr lang="en-US" sz="1400" dirty="0">
+              <a:rPr lang="en-US" sz="1200" dirty="0">
                 <a:solidFill>
                   <a:srgbClr val="8FA3B1"/>
                 </a:solidFill>
               </a:rPr>
-              <a:t>India 1990s</a:t>
-            </a:r>
-            <a:endParaRPr lang="en-US" sz="1400" dirty="0"/>
-          </a:p>
-        </p:txBody>
-      </p:sp>
-      <p:sp>
-        <p:nvSpPr>
-          <p:cNvPr id="11" name="Shape 9"/>
-          <p:cNvSpPr/>
-          <p:nvPr/>
-        </p:nvSpPr>
-        <p:spPr>
-          <a:xfrm>
-            <a:off x="6172200" y="1691640"/>
-            <a:ext cx="2743200" cy="2926080"/>
+              <a:t>rise 1988–2000</a:t>
+            </a:r>
+            <a:endParaRPr lang="en-US" sz="1200" dirty="0"/>
+          </a:p>
+        </p:txBody>
+      </p:sp>
+      <p:sp>
+        <p:nvSpPr>
+          <p:cNvPr id="14" name="Shape 12"/>
+          <p:cNvSpPr/>
+          <p:nvPr/>
+        </p:nvSpPr>
+        <p:spPr>
+          <a:xfrm>
+            <a:off x="6117336" y="3182112"/>
+            <a:ext cx="2651760" cy="1691640"/>
           </a:xfrm>
           <a:prstGeom prst="rect">
             <a:avLst/>
@@ -2336,14 +2454,14 @@
       </p:sp>
       <p:sp>
         <p:nvSpPr>
-          <p:cNvPr id="12" name="Text 10"/>
-          <p:cNvSpPr/>
-          <p:nvPr/>
-        </p:nvSpPr>
-        <p:spPr>
-          <a:xfrm>
-            <a:off x="6172200" y="1920240"/>
-            <a:ext cx="2743200" cy="1280160"/>
+          <p:cNvPr id="15" name="Text 13"/>
+          <p:cNvSpPr/>
+          <p:nvPr/>
+        </p:nvSpPr>
+        <p:spPr>
+          <a:xfrm>
+            <a:off x="6117336" y="3246120"/>
+            <a:ext cx="2651760" cy="868680"/>
           </a:xfrm>
           <a:prstGeom prst="rect">
             <a:avLst/>
@@ -2359,27 +2477,27 @@
               <a:buNone/>
             </a:pPr>
             <a:r>
-              <a:rPr lang="en-US" sz="6400" b="1" dirty="0">
+              <a:rPr lang="en-US" sz="5200" b="1" dirty="0">
                 <a:solidFill>
                   <a:srgbClr val="7B9EBE"/>
                 </a:solidFill>
               </a:rPr>
-              <a:t>↑</a:t>
-            </a:r>
-            <a:endParaRPr lang="en-US" sz="6400" dirty="0"/>
-          </a:p>
-        </p:txBody>
-      </p:sp>
-      <p:sp>
-        <p:nvSpPr>
-          <p:cNvPr id="13" name="Text 11"/>
-          <p:cNvSpPr/>
-          <p:nvPr/>
-        </p:nvSpPr>
-        <p:spPr>
-          <a:xfrm>
-            <a:off x="6355080" y="3246120"/>
-            <a:ext cx="2377440" cy="1097280"/>
+              <a:t>?</a:t>
+            </a:r>
+            <a:endParaRPr lang="en-US" sz="5200" dirty="0"/>
+          </a:p>
+        </p:txBody>
+      </p:sp>
+      <p:sp>
+        <p:nvSpPr>
+          <p:cNvPr id="16" name="Text 14"/>
+          <p:cNvSpPr/>
+          <p:nvPr/>
+        </p:nvSpPr>
+        <p:spPr>
+          <a:xfrm>
+            <a:off x="6254496" y="4133088"/>
+            <a:ext cx="2377440" cy="640080"/>
           </a:xfrm>
           <a:prstGeom prst="rect">
             <a:avLst/>
@@ -2395,64 +2513,28 @@
               <a:buNone/>
             </a:pPr>
             <a:r>
-              <a:rPr lang="en-US" sz="1400" dirty="0">
+              <a:rPr lang="en-US" sz="1200" dirty="0">
                 <a:solidFill>
                   <a:srgbClr val="8FA3B1"/>
                 </a:solidFill>
               </a:rPr>
               <a:t>Bilateral trade</a:t>
             </a:r>
-            <a:endParaRPr lang="en-US" sz="1400" dirty="0"/>
+            <a:endParaRPr lang="en-US" sz="1200" dirty="0"/>
           </a:p>
           <a:p>
             <a:pPr marL="0" indent="0" algn="ctr">
               <a:buNone/>
             </a:pPr>
             <a:r>
-              <a:rPr lang="en-US" sz="1400" dirty="0">
+              <a:rPr lang="en-US" sz="1200" dirty="0">
                 <a:solidFill>
                   <a:srgbClr val="8FA3B1"/>
                 </a:solidFill>
               </a:rPr>
-              <a:t>growing from 1996</a:t>
-            </a:r>
-            <a:endParaRPr lang="en-US" sz="1400" dirty="0"/>
-          </a:p>
-        </p:txBody>
-      </p:sp>
-      <p:sp>
-        <p:nvSpPr>
-          <p:cNvPr id="14" name="Text 12"/>
-          <p:cNvSpPr/>
-          <p:nvPr/>
-        </p:nvSpPr>
-        <p:spPr>
-          <a:xfrm>
-            <a:off x="457200" y="4663440"/>
-            <a:ext cx="8229600" cy="365760"/>
-          </a:xfrm>
-          <a:prstGeom prst="rect">
-            <a:avLst/>
-          </a:prstGeom>
-          <a:noFill/>
-          <a:ln/>
-        </p:spPr>
-        <p:txBody>
-          <a:bodyPr wrap="square" rtlCol="0" anchor="ctr"/>
-          <a:lstStyle/>
-          <a:p>
-            <a:pPr marL="0" indent="0" algn="ctr">
-              <a:buNone/>
-            </a:pPr>
-            <a:r>
-              <a:rPr lang="en-US" sz="1400" i="1" dirty="0">
-                <a:solidFill>
-                  <a:srgbClr val="1B998B"/>
-                </a:solidFill>
-              </a:rPr>
-              <a:t>The question: does rising military spending kill trade — or do they coexist?</a:t>
-            </a:r>
-            <a:endParaRPr lang="en-US" sz="1400" dirty="0"/>
+              <a:t>during this period</a:t>
+            </a:r>
+            <a:endParaRPr lang="en-US" sz="1200" dirty="0"/>
           </a:p>
         </p:txBody>
       </p:sp>
@@ -2470,7 +2552,7 @@
     <p:bg>
       <p:bgPr>
         <a:solidFill>
-          <a:srgbClr val="F0F4F8"/>
+          <a:srgbClr val="0D1B2A"/>
         </a:solidFill>
         <a:effectLst/>
       </p:bgPr>
@@ -2498,11 +2580,11 @@
         <p:spPr>
           <a:xfrm>
             <a:off x="457200" y="256032"/>
-            <a:ext cx="2377440" cy="301752"/>
+            <a:ext cx="2011680" cy="292608"/>
           </a:xfrm>
           <a:prstGeom prst="roundRect">
             <a:avLst>
-              <a:gd name="adj" fmla="val 15152"/>
+              <a:gd name="adj" fmla="val 15625"/>
             </a:avLst>
           </a:prstGeom>
           <a:solidFill>
@@ -2532,7 +2614,7 @@
         <p:spPr>
           <a:xfrm>
             <a:off x="457200" y="256032"/>
-            <a:ext cx="2377440" cy="301752"/>
+            <a:ext cx="2011680" cy="292608"/>
           </a:xfrm>
           <a:prstGeom prst="rect">
             <a:avLst/>
@@ -2567,8 +2649,8 @@
         </p:nvSpPr>
         <p:spPr>
           <a:xfrm>
-            <a:off x="457200" y="658368"/>
-            <a:ext cx="8229600" cy="502920"/>
+            <a:off x="457200" y="621792"/>
+            <a:ext cx="8229600" cy="530352"/>
           </a:xfrm>
           <a:prstGeom prst="rect">
             <a:avLst/>
@@ -2586,10 +2668,10 @@
             <a:r>
               <a:rPr lang="en-US" sz="3000" b="1" dirty="0">
                 <a:solidFill>
-                  <a:srgbClr val="0D1B2A"/>
-                </a:solidFill>
-              </a:rPr>
-              <a:t>Guns AND butter — the paradox</a:t>
+                  <a:srgbClr val="FFFFFF"/>
+                </a:solidFill>
+              </a:rPr>
+              <a:t>Guns AND butter: the paradox</a:t>
             </a:r>
             <a:endParaRPr lang="en-US" sz="3000" dirty="0"/>
           </a:p>
@@ -2597,20 +2679,20 @@
       </p:sp>
       <p:sp>
         <p:nvSpPr>
-          <p:cNvPr id="5" name="Shape 3"/>
-          <p:cNvSpPr/>
-          <p:nvPr/>
-        </p:nvSpPr>
-        <p:spPr>
-          <a:xfrm>
-            <a:off x="411480" y="1280160"/>
-            <a:ext cx="5394960" cy="3474720"/>
+          <p:cNvPr id="59" name="Shape 57"/>
+          <p:cNvSpPr/>
+          <p:nvPr/>
+        </p:nvSpPr>
+        <p:spPr>
+          <a:xfrm>
+            <a:off x="6172200" y="1261872"/>
+            <a:ext cx="2606040" cy="3657600"/>
           </a:xfrm>
           <a:prstGeom prst="rect">
             <a:avLst/>
           </a:prstGeom>
           <a:solidFill>
-            <a:srgbClr val="0D1B2A"/>
+            <a:srgbClr val="1C3A52"/>
           </a:solidFill>
           <a:ln w="12700">
             <a:solidFill>
@@ -2636,14 +2718,14 @@
       </p:sp>
       <p:sp>
         <p:nvSpPr>
-          <p:cNvPr id="6" name="Text 4"/>
-          <p:cNvSpPr/>
-          <p:nvPr/>
-        </p:nvSpPr>
-        <p:spPr>
-          <a:xfrm>
-            <a:off x="594360" y="1389888"/>
-            <a:ext cx="5029200" cy="274320"/>
+          <p:cNvPr id="60" name="Text 58"/>
+          <p:cNvSpPr/>
+          <p:nvPr/>
+        </p:nvSpPr>
+        <p:spPr>
+          <a:xfrm>
+            <a:off x="6355080" y="1426464"/>
+            <a:ext cx="2240280" cy="347472"/>
           </a:xfrm>
           <a:prstGeom prst="rect">
             <a:avLst/>
@@ -2659,35 +2741,325 @@
               <a:buNone/>
             </a:pPr>
             <a:r>
-              <a:rPr lang="en-US" sz="900" dirty="0">
+              <a:rPr lang="en-US" sz="1300" b="1" dirty="0">
+                <a:solidFill>
+                  <a:srgbClr val="FFFFFF"/>
+                </a:solidFill>
+              </a:rPr>
+              <a:t>Marco's finding</a:t>
+            </a:r>
+            <a:endParaRPr lang="en-US" sz="1300" dirty="0"/>
+          </a:p>
+        </p:txBody>
+      </p:sp>
+      <p:sp>
+        <p:nvSpPr>
+          <p:cNvPr id="61" name="Text 59"/>
+          <p:cNvSpPr/>
+          <p:nvPr/>
+        </p:nvSpPr>
+        <p:spPr>
+          <a:xfrm>
+            <a:off x="6355080" y="1947672"/>
+            <a:ext cx="2240280" cy="256032"/>
+          </a:xfrm>
+          <a:prstGeom prst="rect">
+            <a:avLst/>
+          </a:prstGeom>
+          <a:noFill/>
+          <a:ln/>
+        </p:spPr>
+        <p:txBody>
+          <a:bodyPr wrap="square" rtlCol="0" anchor="ctr"/>
+          <a:lstStyle/>
+          <a:p>
+            <a:pPr marL="0" indent="0">
+              <a:buNone/>
+            </a:pPr>
+            <a:r>
+              <a:rPr lang="en-US" sz="1100" b="1" dirty="0">
+                <a:solidFill>
+                  <a:srgbClr val="1B998B"/>
+                </a:solidFill>
+              </a:rPr>
+              <a:t>▸ Both spend more on arms</a:t>
+            </a:r>
+            <a:endParaRPr lang="en-US" sz="1100" dirty="0"/>
+          </a:p>
+        </p:txBody>
+      </p:sp>
+      <p:sp>
+        <p:nvSpPr>
+          <p:cNvPr id="62" name="Text 60"/>
+          <p:cNvSpPr/>
+          <p:nvPr/>
+        </p:nvSpPr>
+        <p:spPr>
+          <a:xfrm>
+            <a:off x="6355080" y="2203704"/>
+            <a:ext cx="2240280" cy="402336"/>
+          </a:xfrm>
+          <a:prstGeom prst="rect">
+            <a:avLst/>
+          </a:prstGeom>
+          <a:noFill/>
+          <a:ln/>
+        </p:spPr>
+        <p:txBody>
+          <a:bodyPr wrap="square" rtlCol="0" anchor="ctr"/>
+          <a:lstStyle/>
+          <a:p>
+            <a:pPr marL="0" indent="0">
+              <a:buNone/>
+            </a:pPr>
+            <a:r>
+              <a:rPr lang="en-US" sz="1000" dirty="0">
                 <a:solidFill>
                   <a:srgbClr val="8FA3B1"/>
                 </a:solidFill>
               </a:rPr>
-              <a:t>India vs. Pakistan · Military Expenditure &amp; Bilateral Trade · 1988–2010</a:t>
-            </a:r>
-            <a:endParaRPr lang="en-US" sz="900" dirty="0"/>
-          </a:p>
-        </p:txBody>
-      </p:sp>
-      <p:sp>
-        <p:nvSpPr>
-          <p:cNvPr id="7" name="Shape 5"/>
-          <p:cNvSpPr/>
-          <p:nvPr/>
-        </p:nvSpPr>
-        <p:spPr>
-          <a:xfrm>
-            <a:off x="1005840" y="4114800"/>
-            <a:ext cx="365760" cy="0"/>
-          </a:xfrm>
-          <a:prstGeom prst="line">
-            <a:avLst/>
-          </a:prstGeom>
-          <a:noFill/>
-          <a:ln w="25400">
+              <a:t>India's military budget doubles from 1993-2004. </a:t>
+            </a:r>
+            <a:endParaRPr lang="en-US" sz="1000" dirty="0"/>
+          </a:p>
+        </p:txBody>
+      </p:sp>
+      <p:sp>
+        <p:nvSpPr>
+          <p:cNvPr id="63" name="Text 61"/>
+          <p:cNvSpPr/>
+          <p:nvPr/>
+        </p:nvSpPr>
+        <p:spPr>
+          <a:xfrm>
+            <a:off x="6355080" y="2679192"/>
+            <a:ext cx="2240280" cy="256032"/>
+          </a:xfrm>
+          <a:prstGeom prst="rect">
+            <a:avLst/>
+          </a:prstGeom>
+          <a:noFill/>
+          <a:ln/>
+        </p:spPr>
+        <p:txBody>
+          <a:bodyPr wrap="square" rtlCol="0" anchor="ctr"/>
+          <a:lstStyle/>
+          <a:p>
+            <a:pPr marL="0" indent="0">
+              <a:buNone/>
+            </a:pPr>
+            <a:r>
+              <a:rPr lang="en-US" sz="1100" b="1" dirty="0">
+                <a:solidFill>
+                  <a:srgbClr val="1B998B"/>
+                </a:solidFill>
+              </a:rPr>
+              <a:t>▸ Trade was flat - then it wasn't</a:t>
+            </a:r>
+            <a:endParaRPr lang="en-US" sz="1100" dirty="0"/>
+          </a:p>
+        </p:txBody>
+      </p:sp>
+      <p:sp>
+        <p:nvSpPr>
+          <p:cNvPr id="64" name="Text 62"/>
+          <p:cNvSpPr/>
+          <p:nvPr/>
+        </p:nvSpPr>
+        <p:spPr>
+          <a:xfrm>
+            <a:off x="6355080" y="2935224"/>
+            <a:ext cx="2240280" cy="402336"/>
+          </a:xfrm>
+          <a:prstGeom prst="rect">
+            <a:avLst/>
+          </a:prstGeom>
+          <a:noFill/>
+          <a:ln/>
+        </p:spPr>
+        <p:txBody>
+          <a:bodyPr wrap="square" rtlCol="0" anchor="ctr"/>
+          <a:lstStyle/>
+          <a:p>
+            <a:pPr marL="0" indent="0">
+              <a:buNone/>
+            </a:pPr>
+            <a:r>
+              <a:rPr lang="en-US" sz="1000" dirty="0">
+                <a:solidFill>
+                  <a:srgbClr val="8FA3B1"/>
+                </a:solidFill>
+              </a:rPr>
+              <a:t>Bilateral trade was near zero until 1995, then starts climbing consistently.</a:t>
+            </a:r>
+            <a:endParaRPr lang="en-US" sz="1000" dirty="0"/>
+          </a:p>
+        </p:txBody>
+      </p:sp>
+      <p:sp>
+        <p:nvSpPr>
+          <p:cNvPr id="65" name="Text 63"/>
+          <p:cNvSpPr/>
+          <p:nvPr/>
+        </p:nvSpPr>
+        <p:spPr>
+          <a:xfrm>
+            <a:off x="6355080" y="3410712"/>
+            <a:ext cx="2240280" cy="256032"/>
+          </a:xfrm>
+          <a:prstGeom prst="rect">
+            <a:avLst/>
+          </a:prstGeom>
+          <a:noFill/>
+          <a:ln/>
+        </p:spPr>
+        <p:txBody>
+          <a:bodyPr wrap="square" rtlCol="0" anchor="ctr"/>
+          <a:lstStyle/>
+          <a:p>
+            <a:pPr marL="0" indent="0">
+              <a:buNone/>
+            </a:pPr>
+            <a:r>
+              <a:rPr lang="en-US" sz="1100" b="1" dirty="0">
+                <a:solidFill>
+                  <a:srgbClr val="1B998B"/>
+                </a:solidFill>
+              </a:rPr>
+              <a:t>▸ Kargil barely dents it</a:t>
+            </a:r>
+            <a:endParaRPr lang="en-US" sz="1100" dirty="0"/>
+          </a:p>
+        </p:txBody>
+      </p:sp>
+      <p:sp>
+        <p:nvSpPr>
+          <p:cNvPr id="66" name="Text 64"/>
+          <p:cNvSpPr/>
+          <p:nvPr/>
+        </p:nvSpPr>
+        <p:spPr>
+          <a:xfrm>
+            <a:off x="6355080" y="3666744"/>
+            <a:ext cx="2240280" cy="402336"/>
+          </a:xfrm>
+          <a:prstGeom prst="rect">
+            <a:avLst/>
+          </a:prstGeom>
+          <a:noFill/>
+          <a:ln/>
+        </p:spPr>
+        <p:txBody>
+          <a:bodyPr wrap="square" rtlCol="0" anchor="ctr"/>
+          <a:lstStyle/>
+          <a:p>
+            <a:pPr marL="0" indent="0">
+              <a:buNone/>
+            </a:pPr>
+            <a:r>
+              <a:rPr lang="en-US" sz="1000" dirty="0">
+                <a:solidFill>
+                  <a:srgbClr val="8FA3B1"/>
+                </a:solidFill>
+              </a:rPr>
+              <a:t>Even the 1999 war barely interrupts the trade upturn. Commerce proves resilient.</a:t>
+            </a:r>
+            <a:endParaRPr lang="en-US" sz="1000" dirty="0"/>
+          </a:p>
+        </p:txBody>
+      </p:sp>
+      <p:sp>
+        <p:nvSpPr>
+          <p:cNvPr id="67" name="Text 65"/>
+          <p:cNvSpPr/>
+          <p:nvPr/>
+        </p:nvSpPr>
+        <p:spPr>
+          <a:xfrm>
+            <a:off x="6355080" y="4142232"/>
+            <a:ext cx="2240280" cy="256032"/>
+          </a:xfrm>
+          <a:prstGeom prst="rect">
+            <a:avLst/>
+          </a:prstGeom>
+          <a:noFill/>
+          <a:ln/>
+        </p:spPr>
+        <p:txBody>
+          <a:bodyPr wrap="square" rtlCol="0" anchor="ctr"/>
+          <a:lstStyle/>
+          <a:p>
+            <a:pPr marL="0" indent="0">
+              <a:buNone/>
+            </a:pPr>
+            <a:r>
+              <a:rPr lang="en-US" sz="1100" b="1" dirty="0">
+                <a:solidFill>
+                  <a:srgbClr val="1B998B"/>
+                </a:solidFill>
+              </a:rPr>
+              <a:t>▸ The paradox</a:t>
+            </a:r>
+            <a:endParaRPr lang="en-US" sz="1100" dirty="0"/>
+          </a:p>
+        </p:txBody>
+      </p:sp>
+      <p:sp>
+        <p:nvSpPr>
+          <p:cNvPr id="68" name="Text 66"/>
+          <p:cNvSpPr/>
+          <p:nvPr/>
+        </p:nvSpPr>
+        <p:spPr>
+          <a:xfrm>
+            <a:off x="6355080" y="4398264"/>
+            <a:ext cx="2240280" cy="402336"/>
+          </a:xfrm>
+          <a:prstGeom prst="rect">
+            <a:avLst/>
+          </a:prstGeom>
+          <a:noFill/>
+          <a:ln/>
+        </p:spPr>
+        <p:txBody>
+          <a:bodyPr wrap="square" rtlCol="0" anchor="ctr"/>
+          <a:lstStyle/>
+          <a:p>
+            <a:pPr marL="0" indent="0">
+              <a:buNone/>
+            </a:pPr>
+            <a:r>
+              <a:rPr lang="en-US" sz="1000" dirty="0">
+                <a:solidFill>
+                  <a:srgbClr val="8FA3B1"/>
+                </a:solidFill>
+              </a:rPr>
+              <a:t>Guns AND butter. Rivals arm up and trade up simultaneously.</a:t>
+            </a:r>
+            <a:endParaRPr lang="en-US" sz="1000" dirty="0"/>
+          </a:p>
+        </p:txBody>
+      </p:sp>
+      <p:sp>
+        <p:nvSpPr>
+          <p:cNvPr id="69" name="Shape 67"/>
+          <p:cNvSpPr/>
+          <p:nvPr/>
+        </p:nvSpPr>
+        <p:spPr>
+          <a:xfrm>
+            <a:off x="6172200" y="4352544"/>
+            <a:ext cx="2606040" cy="566928"/>
+          </a:xfrm>
+          <a:prstGeom prst="rect">
+            <a:avLst/>
+          </a:prstGeom>
+          <a:solidFill>
+            <a:srgbClr val="0A1520"/>
+          </a:solidFill>
+          <a:ln w="12700">
             <a:solidFill>
-              <a:srgbClr val="1B998B"/>
+              <a:srgbClr val="1C3A52"/>
             </a:solidFill>
             <a:prstDash val="solid"/>
           </a:ln>
@@ -2702,1100 +3074,14 @@
       </p:sp>
       <p:sp>
         <p:nvSpPr>
-          <p:cNvPr id="8" name="Shape 6"/>
-          <p:cNvSpPr/>
-          <p:nvPr/>
-        </p:nvSpPr>
-        <p:spPr>
-          <a:xfrm>
-            <a:off x="1371600" y="3931920"/>
-            <a:ext cx="365760" cy="0"/>
-          </a:xfrm>
-          <a:prstGeom prst="line">
-            <a:avLst/>
-          </a:prstGeom>
-          <a:noFill/>
-          <a:ln w="25400">
-            <a:solidFill>
-              <a:srgbClr val="1B998B"/>
-            </a:solidFill>
-            <a:prstDash val="solid"/>
-          </a:ln>
-        </p:spPr>
-        <p:txBody>
-          <a:bodyPr/>
-          <a:lstStyle/>
-          <a:p>
-            <a:endParaRPr lang="de-CH"/>
-          </a:p>
-        </p:txBody>
-      </p:sp>
-      <p:sp>
-        <p:nvSpPr>
-          <p:cNvPr id="9" name="Shape 7"/>
-          <p:cNvSpPr/>
-          <p:nvPr/>
-        </p:nvSpPr>
-        <p:spPr>
-          <a:xfrm>
-            <a:off x="1737360" y="3749040"/>
-            <a:ext cx="365760" cy="0"/>
-          </a:xfrm>
-          <a:prstGeom prst="line">
-            <a:avLst/>
-          </a:prstGeom>
-          <a:noFill/>
-          <a:ln w="25400">
-            <a:solidFill>
-              <a:srgbClr val="1B998B"/>
-            </a:solidFill>
-            <a:prstDash val="solid"/>
-          </a:ln>
-        </p:spPr>
-        <p:txBody>
-          <a:bodyPr/>
-          <a:lstStyle/>
-          <a:p>
-            <a:endParaRPr lang="de-CH"/>
-          </a:p>
-        </p:txBody>
-      </p:sp>
-      <p:sp>
-        <p:nvSpPr>
-          <p:cNvPr id="10" name="Shape 8"/>
-          <p:cNvSpPr/>
-          <p:nvPr/>
-        </p:nvSpPr>
-        <p:spPr>
-          <a:xfrm>
-            <a:off x="2103120" y="3566160"/>
-            <a:ext cx="365760" cy="0"/>
-          </a:xfrm>
-          <a:prstGeom prst="line">
-            <a:avLst/>
-          </a:prstGeom>
-          <a:noFill/>
-          <a:ln w="25400">
-            <a:solidFill>
-              <a:srgbClr val="1B998B"/>
-            </a:solidFill>
-            <a:prstDash val="solid"/>
-          </a:ln>
-        </p:spPr>
-        <p:txBody>
-          <a:bodyPr/>
-          <a:lstStyle/>
-          <a:p>
-            <a:endParaRPr lang="de-CH"/>
-          </a:p>
-        </p:txBody>
-      </p:sp>
-      <p:sp>
-        <p:nvSpPr>
-          <p:cNvPr id="11" name="Shape 9"/>
-          <p:cNvSpPr/>
-          <p:nvPr/>
-        </p:nvSpPr>
-        <p:spPr>
-          <a:xfrm>
-            <a:off x="2468880" y="3291840"/>
-            <a:ext cx="365760" cy="0"/>
-          </a:xfrm>
-          <a:prstGeom prst="line">
-            <a:avLst/>
-          </a:prstGeom>
-          <a:noFill/>
-          <a:ln w="25400">
-            <a:solidFill>
-              <a:srgbClr val="1B998B"/>
-            </a:solidFill>
-            <a:prstDash val="solid"/>
-          </a:ln>
-        </p:spPr>
-        <p:txBody>
-          <a:bodyPr/>
-          <a:lstStyle/>
-          <a:p>
-            <a:endParaRPr lang="de-CH"/>
-          </a:p>
-        </p:txBody>
-      </p:sp>
-      <p:sp>
-        <p:nvSpPr>
-          <p:cNvPr id="12" name="Shape 10"/>
-          <p:cNvSpPr/>
-          <p:nvPr/>
-        </p:nvSpPr>
-        <p:spPr>
-          <a:xfrm>
-            <a:off x="2834640" y="3017520"/>
-            <a:ext cx="365760" cy="0"/>
-          </a:xfrm>
-          <a:prstGeom prst="line">
-            <a:avLst/>
-          </a:prstGeom>
-          <a:noFill/>
-          <a:ln w="25400">
-            <a:solidFill>
-              <a:srgbClr val="1B998B"/>
-            </a:solidFill>
-            <a:prstDash val="solid"/>
-          </a:ln>
-        </p:spPr>
-        <p:txBody>
-          <a:bodyPr/>
-          <a:lstStyle/>
-          <a:p>
-            <a:endParaRPr lang="de-CH"/>
-          </a:p>
-        </p:txBody>
-      </p:sp>
-      <p:sp>
-        <p:nvSpPr>
-          <p:cNvPr id="13" name="Shape 11"/>
-          <p:cNvSpPr/>
-          <p:nvPr/>
-        </p:nvSpPr>
-        <p:spPr>
-          <a:xfrm>
-            <a:off x="3200400" y="2743200"/>
-            <a:ext cx="365760" cy="0"/>
-          </a:xfrm>
-          <a:prstGeom prst="line">
-            <a:avLst/>
-          </a:prstGeom>
-          <a:noFill/>
-          <a:ln w="25400">
-            <a:solidFill>
-              <a:srgbClr val="1B998B"/>
-            </a:solidFill>
-            <a:prstDash val="solid"/>
-          </a:ln>
-        </p:spPr>
-        <p:txBody>
-          <a:bodyPr/>
-          <a:lstStyle/>
-          <a:p>
-            <a:endParaRPr lang="de-CH"/>
-          </a:p>
-        </p:txBody>
-      </p:sp>
-      <p:sp>
-        <p:nvSpPr>
-          <p:cNvPr id="14" name="Shape 12"/>
-          <p:cNvSpPr/>
-          <p:nvPr/>
-        </p:nvSpPr>
-        <p:spPr>
-          <a:xfrm>
-            <a:off x="3566160" y="2560320"/>
-            <a:ext cx="365760" cy="0"/>
-          </a:xfrm>
-          <a:prstGeom prst="line">
-            <a:avLst/>
-          </a:prstGeom>
-          <a:noFill/>
-          <a:ln w="25400">
-            <a:solidFill>
-              <a:srgbClr val="1B998B"/>
-            </a:solidFill>
-            <a:prstDash val="solid"/>
-          </a:ln>
-        </p:spPr>
-        <p:txBody>
-          <a:bodyPr/>
-          <a:lstStyle/>
-          <a:p>
-            <a:endParaRPr lang="de-CH"/>
-          </a:p>
-        </p:txBody>
-      </p:sp>
-      <p:sp>
-        <p:nvSpPr>
-          <p:cNvPr id="15" name="Shape 13"/>
-          <p:cNvSpPr/>
-          <p:nvPr/>
-        </p:nvSpPr>
-        <p:spPr>
-          <a:xfrm>
-            <a:off x="3931920" y="2377440"/>
-            <a:ext cx="365760" cy="0"/>
-          </a:xfrm>
-          <a:prstGeom prst="line">
-            <a:avLst/>
-          </a:prstGeom>
-          <a:noFill/>
-          <a:ln w="25400">
-            <a:solidFill>
-              <a:srgbClr val="1B998B"/>
-            </a:solidFill>
-            <a:prstDash val="solid"/>
-          </a:ln>
-        </p:spPr>
-        <p:txBody>
-          <a:bodyPr/>
-          <a:lstStyle/>
-          <a:p>
-            <a:endParaRPr lang="de-CH"/>
-          </a:p>
-        </p:txBody>
-      </p:sp>
-      <p:sp>
-        <p:nvSpPr>
-          <p:cNvPr id="16" name="Shape 14"/>
-          <p:cNvSpPr/>
-          <p:nvPr/>
-        </p:nvSpPr>
-        <p:spPr>
-          <a:xfrm>
-            <a:off x="4297680" y="2194560"/>
-            <a:ext cx="365760" cy="0"/>
-          </a:xfrm>
-          <a:prstGeom prst="line">
-            <a:avLst/>
-          </a:prstGeom>
-          <a:noFill/>
-          <a:ln w="25400">
-            <a:solidFill>
-              <a:srgbClr val="1B998B"/>
-            </a:solidFill>
-            <a:prstDash val="solid"/>
-          </a:ln>
-        </p:spPr>
-        <p:txBody>
-          <a:bodyPr/>
-          <a:lstStyle/>
-          <a:p>
-            <a:endParaRPr lang="de-CH"/>
-          </a:p>
-        </p:txBody>
-      </p:sp>
-      <p:sp>
-        <p:nvSpPr>
-          <p:cNvPr id="17" name="Shape 15"/>
-          <p:cNvSpPr/>
-          <p:nvPr/>
-        </p:nvSpPr>
-        <p:spPr>
-          <a:xfrm>
-            <a:off x="4663440" y="2103120"/>
-            <a:ext cx="365760" cy="0"/>
-          </a:xfrm>
-          <a:prstGeom prst="line">
-            <a:avLst/>
-          </a:prstGeom>
-          <a:noFill/>
-          <a:ln w="25400">
-            <a:solidFill>
-              <a:srgbClr val="1B998B"/>
-            </a:solidFill>
-            <a:prstDash val="solid"/>
-          </a:ln>
-        </p:spPr>
-        <p:txBody>
-          <a:bodyPr/>
-          <a:lstStyle/>
-          <a:p>
-            <a:endParaRPr lang="de-CH"/>
-          </a:p>
-        </p:txBody>
-      </p:sp>
-      <p:sp>
-        <p:nvSpPr>
-          <p:cNvPr id="18" name="Shape 16"/>
-          <p:cNvSpPr/>
-          <p:nvPr/>
-        </p:nvSpPr>
-        <p:spPr>
-          <a:xfrm>
-            <a:off x="5029200" y="2011680"/>
-            <a:ext cx="365760" cy="0"/>
-          </a:xfrm>
-          <a:prstGeom prst="line">
-            <a:avLst/>
-          </a:prstGeom>
-          <a:noFill/>
-          <a:ln w="25400">
-            <a:solidFill>
-              <a:srgbClr val="1B998B"/>
-            </a:solidFill>
-            <a:prstDash val="solid"/>
-          </a:ln>
-        </p:spPr>
-        <p:txBody>
-          <a:bodyPr/>
-          <a:lstStyle/>
-          <a:p>
-            <a:endParaRPr lang="de-CH"/>
-          </a:p>
-        </p:txBody>
-      </p:sp>
-      <p:sp>
-        <p:nvSpPr>
-          <p:cNvPr id="19" name="Shape 17"/>
-          <p:cNvSpPr/>
-          <p:nvPr/>
-        </p:nvSpPr>
-        <p:spPr>
-          <a:xfrm>
-            <a:off x="1005840" y="3657600"/>
-            <a:ext cx="365760" cy="0"/>
-          </a:xfrm>
-          <a:prstGeom prst="line">
-            <a:avLst/>
-          </a:prstGeom>
-          <a:noFill/>
-          <a:ln w="25400">
-            <a:solidFill>
-              <a:srgbClr val="7B9EBE"/>
-            </a:solidFill>
-            <a:prstDash val="solid"/>
-          </a:ln>
-        </p:spPr>
-        <p:txBody>
-          <a:bodyPr/>
-          <a:lstStyle/>
-          <a:p>
-            <a:endParaRPr lang="de-CH"/>
-          </a:p>
-        </p:txBody>
-      </p:sp>
-      <p:sp>
-        <p:nvSpPr>
-          <p:cNvPr id="20" name="Shape 18"/>
-          <p:cNvSpPr/>
-          <p:nvPr/>
-        </p:nvSpPr>
-        <p:spPr>
-          <a:xfrm>
-            <a:off x="1371600" y="3566160"/>
-            <a:ext cx="365760" cy="0"/>
-          </a:xfrm>
-          <a:prstGeom prst="line">
-            <a:avLst/>
-          </a:prstGeom>
-          <a:noFill/>
-          <a:ln w="25400">
-            <a:solidFill>
-              <a:srgbClr val="7B9EBE"/>
-            </a:solidFill>
-            <a:prstDash val="solid"/>
-          </a:ln>
-        </p:spPr>
-        <p:txBody>
-          <a:bodyPr/>
-          <a:lstStyle/>
-          <a:p>
-            <a:endParaRPr lang="de-CH"/>
-          </a:p>
-        </p:txBody>
-      </p:sp>
-      <p:sp>
-        <p:nvSpPr>
-          <p:cNvPr id="21" name="Shape 19"/>
-          <p:cNvSpPr/>
-          <p:nvPr/>
-        </p:nvSpPr>
-        <p:spPr>
-          <a:xfrm>
-            <a:off x="1737360" y="3520440"/>
-            <a:ext cx="365760" cy="0"/>
-          </a:xfrm>
-          <a:prstGeom prst="line">
-            <a:avLst/>
-          </a:prstGeom>
-          <a:noFill/>
-          <a:ln w="25400">
-            <a:solidFill>
-              <a:srgbClr val="7B9EBE"/>
-            </a:solidFill>
-            <a:prstDash val="solid"/>
-          </a:ln>
-        </p:spPr>
-        <p:txBody>
-          <a:bodyPr/>
-          <a:lstStyle/>
-          <a:p>
-            <a:endParaRPr lang="de-CH"/>
-          </a:p>
-        </p:txBody>
-      </p:sp>
-      <p:sp>
-        <p:nvSpPr>
-          <p:cNvPr id="22" name="Shape 20"/>
-          <p:cNvSpPr/>
-          <p:nvPr/>
-        </p:nvSpPr>
-        <p:spPr>
-          <a:xfrm>
-            <a:off x="2103120" y="3474720"/>
-            <a:ext cx="365760" cy="0"/>
-          </a:xfrm>
-          <a:prstGeom prst="line">
-            <a:avLst/>
-          </a:prstGeom>
-          <a:noFill/>
-          <a:ln w="25400">
-            <a:solidFill>
-              <a:srgbClr val="7B9EBE"/>
-            </a:solidFill>
-            <a:prstDash val="solid"/>
-          </a:ln>
-        </p:spPr>
-        <p:txBody>
-          <a:bodyPr/>
-          <a:lstStyle/>
-          <a:p>
-            <a:endParaRPr lang="de-CH"/>
-          </a:p>
-        </p:txBody>
-      </p:sp>
-      <p:sp>
-        <p:nvSpPr>
-          <p:cNvPr id="23" name="Shape 21"/>
-          <p:cNvSpPr/>
-          <p:nvPr/>
-        </p:nvSpPr>
-        <p:spPr>
-          <a:xfrm>
-            <a:off x="2468880" y="3383280"/>
-            <a:ext cx="365760" cy="0"/>
-          </a:xfrm>
-          <a:prstGeom prst="line">
-            <a:avLst/>
-          </a:prstGeom>
-          <a:noFill/>
-          <a:ln w="25400">
-            <a:solidFill>
-              <a:srgbClr val="7B9EBE"/>
-            </a:solidFill>
-            <a:prstDash val="solid"/>
-          </a:ln>
-        </p:spPr>
-        <p:txBody>
-          <a:bodyPr/>
-          <a:lstStyle/>
-          <a:p>
-            <a:endParaRPr lang="de-CH"/>
-          </a:p>
-        </p:txBody>
-      </p:sp>
-      <p:sp>
-        <p:nvSpPr>
-          <p:cNvPr id="24" name="Shape 22"/>
-          <p:cNvSpPr/>
-          <p:nvPr/>
-        </p:nvSpPr>
-        <p:spPr>
-          <a:xfrm>
-            <a:off x="2834640" y="3291840"/>
-            <a:ext cx="365760" cy="0"/>
-          </a:xfrm>
-          <a:prstGeom prst="line">
-            <a:avLst/>
-          </a:prstGeom>
-          <a:noFill/>
-          <a:ln w="25400">
-            <a:solidFill>
-              <a:srgbClr val="7B9EBE"/>
-            </a:solidFill>
-            <a:prstDash val="solid"/>
-          </a:ln>
-        </p:spPr>
-        <p:txBody>
-          <a:bodyPr/>
-          <a:lstStyle/>
-          <a:p>
-            <a:endParaRPr lang="de-CH"/>
-          </a:p>
-        </p:txBody>
-      </p:sp>
-      <p:sp>
-        <p:nvSpPr>
-          <p:cNvPr id="25" name="Shape 23"/>
-          <p:cNvSpPr/>
-          <p:nvPr/>
-        </p:nvSpPr>
-        <p:spPr>
-          <a:xfrm>
-            <a:off x="3200400" y="3200400"/>
-            <a:ext cx="365760" cy="0"/>
-          </a:xfrm>
-          <a:prstGeom prst="line">
-            <a:avLst/>
-          </a:prstGeom>
-          <a:noFill/>
-          <a:ln w="25400">
-            <a:solidFill>
-              <a:srgbClr val="7B9EBE"/>
-            </a:solidFill>
-            <a:prstDash val="solid"/>
-          </a:ln>
-        </p:spPr>
-        <p:txBody>
-          <a:bodyPr/>
-          <a:lstStyle/>
-          <a:p>
-            <a:endParaRPr lang="de-CH"/>
-          </a:p>
-        </p:txBody>
-      </p:sp>
-      <p:sp>
-        <p:nvSpPr>
-          <p:cNvPr id="26" name="Shape 24"/>
-          <p:cNvSpPr/>
-          <p:nvPr/>
-        </p:nvSpPr>
-        <p:spPr>
-          <a:xfrm>
-            <a:off x="3566160" y="3154680"/>
-            <a:ext cx="365760" cy="0"/>
-          </a:xfrm>
-          <a:prstGeom prst="line">
-            <a:avLst/>
-          </a:prstGeom>
-          <a:noFill/>
-          <a:ln w="25400">
-            <a:solidFill>
-              <a:srgbClr val="7B9EBE"/>
-            </a:solidFill>
-            <a:prstDash val="solid"/>
-          </a:ln>
-        </p:spPr>
-        <p:txBody>
-          <a:bodyPr/>
-          <a:lstStyle/>
-          <a:p>
-            <a:endParaRPr lang="de-CH"/>
-          </a:p>
-        </p:txBody>
-      </p:sp>
-      <p:sp>
-        <p:nvSpPr>
-          <p:cNvPr id="27" name="Shape 25"/>
-          <p:cNvSpPr/>
-          <p:nvPr/>
-        </p:nvSpPr>
-        <p:spPr>
-          <a:xfrm>
-            <a:off x="3931920" y="3108960"/>
-            <a:ext cx="365760" cy="0"/>
-          </a:xfrm>
-          <a:prstGeom prst="line">
-            <a:avLst/>
-          </a:prstGeom>
-          <a:noFill/>
-          <a:ln w="25400">
-            <a:solidFill>
-              <a:srgbClr val="7B9EBE"/>
-            </a:solidFill>
-            <a:prstDash val="solid"/>
-          </a:ln>
-        </p:spPr>
-        <p:txBody>
-          <a:bodyPr/>
-          <a:lstStyle/>
-          <a:p>
-            <a:endParaRPr lang="de-CH"/>
-          </a:p>
-        </p:txBody>
-      </p:sp>
-      <p:sp>
-        <p:nvSpPr>
-          <p:cNvPr id="28" name="Shape 26"/>
-          <p:cNvSpPr/>
-          <p:nvPr/>
-        </p:nvSpPr>
-        <p:spPr>
-          <a:xfrm>
-            <a:off x="4297680" y="3063240"/>
-            <a:ext cx="365760" cy="0"/>
-          </a:xfrm>
-          <a:prstGeom prst="line">
-            <a:avLst/>
-          </a:prstGeom>
-          <a:noFill/>
-          <a:ln w="25400">
-            <a:solidFill>
-              <a:srgbClr val="7B9EBE"/>
-            </a:solidFill>
-            <a:prstDash val="solid"/>
-          </a:ln>
-        </p:spPr>
-        <p:txBody>
-          <a:bodyPr/>
-          <a:lstStyle/>
-          <a:p>
-            <a:endParaRPr lang="de-CH"/>
-          </a:p>
-        </p:txBody>
-      </p:sp>
-      <p:sp>
-        <p:nvSpPr>
-          <p:cNvPr id="29" name="Shape 27"/>
-          <p:cNvSpPr/>
-          <p:nvPr/>
-        </p:nvSpPr>
-        <p:spPr>
-          <a:xfrm>
-            <a:off x="4663440" y="3017520"/>
-            <a:ext cx="365760" cy="0"/>
-          </a:xfrm>
-          <a:prstGeom prst="line">
-            <a:avLst/>
-          </a:prstGeom>
-          <a:noFill/>
-          <a:ln w="25400">
-            <a:solidFill>
-              <a:srgbClr val="7B9EBE"/>
-            </a:solidFill>
-            <a:prstDash val="solid"/>
-          </a:ln>
-        </p:spPr>
-        <p:txBody>
-          <a:bodyPr/>
-          <a:lstStyle/>
-          <a:p>
-            <a:endParaRPr lang="de-CH"/>
-          </a:p>
-        </p:txBody>
-      </p:sp>
-      <p:sp>
-        <p:nvSpPr>
-          <p:cNvPr id="30" name="Shape 28"/>
-          <p:cNvSpPr/>
-          <p:nvPr/>
-        </p:nvSpPr>
-        <p:spPr>
-          <a:xfrm>
-            <a:off x="5029200" y="2999232"/>
-            <a:ext cx="365760" cy="0"/>
-          </a:xfrm>
-          <a:prstGeom prst="line">
-            <a:avLst/>
-          </a:prstGeom>
-          <a:noFill/>
-          <a:ln w="25400">
-            <a:solidFill>
-              <a:srgbClr val="7B9EBE"/>
-            </a:solidFill>
-            <a:prstDash val="solid"/>
-          </a:ln>
-        </p:spPr>
-        <p:txBody>
-          <a:bodyPr/>
-          <a:lstStyle/>
-          <a:p>
-            <a:endParaRPr lang="de-CH"/>
-          </a:p>
-        </p:txBody>
-      </p:sp>
-      <p:sp>
-        <p:nvSpPr>
-          <p:cNvPr id="31" name="Shape 29"/>
-          <p:cNvSpPr/>
-          <p:nvPr/>
-        </p:nvSpPr>
-        <p:spPr>
-          <a:xfrm>
-            <a:off x="1005840" y="4663440"/>
-            <a:ext cx="365760" cy="0"/>
-          </a:xfrm>
-          <a:prstGeom prst="line">
-            <a:avLst/>
-          </a:prstGeom>
-          <a:noFill/>
-          <a:ln w="31750">
-            <a:solidFill>
-              <a:srgbClr val="E8C547"/>
-            </a:solidFill>
-            <a:prstDash val="solid"/>
-          </a:ln>
-        </p:spPr>
-        <p:txBody>
-          <a:bodyPr/>
-          <a:lstStyle/>
-          <a:p>
-            <a:endParaRPr lang="de-CH"/>
-          </a:p>
-        </p:txBody>
-      </p:sp>
-      <p:sp>
-        <p:nvSpPr>
-          <p:cNvPr id="32" name="Shape 30"/>
-          <p:cNvSpPr/>
-          <p:nvPr/>
-        </p:nvSpPr>
-        <p:spPr>
-          <a:xfrm>
-            <a:off x="1371600" y="4663440"/>
-            <a:ext cx="365760" cy="0"/>
-          </a:xfrm>
-          <a:prstGeom prst="line">
-            <a:avLst/>
-          </a:prstGeom>
-          <a:noFill/>
-          <a:ln w="31750">
-            <a:solidFill>
-              <a:srgbClr val="E8C547"/>
-            </a:solidFill>
-            <a:prstDash val="solid"/>
-          </a:ln>
-        </p:spPr>
-        <p:txBody>
-          <a:bodyPr/>
-          <a:lstStyle/>
-          <a:p>
-            <a:endParaRPr lang="de-CH"/>
-          </a:p>
-        </p:txBody>
-      </p:sp>
-      <p:sp>
-        <p:nvSpPr>
-          <p:cNvPr id="33" name="Shape 31"/>
-          <p:cNvSpPr/>
-          <p:nvPr/>
-        </p:nvSpPr>
-        <p:spPr>
-          <a:xfrm>
-            <a:off x="1737360" y="4663440"/>
-            <a:ext cx="365760" cy="0"/>
-          </a:xfrm>
-          <a:prstGeom prst="line">
-            <a:avLst/>
-          </a:prstGeom>
-          <a:noFill/>
-          <a:ln w="31750">
-            <a:solidFill>
-              <a:srgbClr val="E8C547"/>
-            </a:solidFill>
-            <a:prstDash val="solid"/>
-          </a:ln>
-        </p:spPr>
-        <p:txBody>
-          <a:bodyPr/>
-          <a:lstStyle/>
-          <a:p>
-            <a:endParaRPr lang="de-CH"/>
-          </a:p>
-        </p:txBody>
-      </p:sp>
-      <p:sp>
-        <p:nvSpPr>
-          <p:cNvPr id="34" name="Shape 32"/>
-          <p:cNvSpPr/>
-          <p:nvPr/>
-        </p:nvSpPr>
-        <p:spPr>
-          <a:xfrm>
-            <a:off x="2103120" y="4663440"/>
-            <a:ext cx="365760" cy="0"/>
-          </a:xfrm>
-          <a:prstGeom prst="line">
-            <a:avLst/>
-          </a:prstGeom>
-          <a:noFill/>
-          <a:ln w="31750">
-            <a:solidFill>
-              <a:srgbClr val="E8C547"/>
-            </a:solidFill>
-            <a:prstDash val="solid"/>
-          </a:ln>
-        </p:spPr>
-        <p:txBody>
-          <a:bodyPr/>
-          <a:lstStyle/>
-          <a:p>
-            <a:endParaRPr lang="de-CH"/>
-          </a:p>
-        </p:txBody>
-      </p:sp>
-      <p:sp>
-        <p:nvSpPr>
-          <p:cNvPr id="35" name="Shape 33"/>
-          <p:cNvSpPr/>
-          <p:nvPr/>
-        </p:nvSpPr>
-        <p:spPr>
-          <a:xfrm>
-            <a:off x="2468880" y="4617720"/>
-            <a:ext cx="365760" cy="0"/>
-          </a:xfrm>
-          <a:prstGeom prst="line">
-            <a:avLst/>
-          </a:prstGeom>
-          <a:noFill/>
-          <a:ln w="31750">
-            <a:solidFill>
-              <a:srgbClr val="E8C547"/>
-            </a:solidFill>
-            <a:prstDash val="solid"/>
-          </a:ln>
-        </p:spPr>
-        <p:txBody>
-          <a:bodyPr/>
-          <a:lstStyle/>
-          <a:p>
-            <a:endParaRPr lang="de-CH"/>
-          </a:p>
-        </p:txBody>
-      </p:sp>
-      <p:sp>
-        <p:nvSpPr>
-          <p:cNvPr id="36" name="Shape 34"/>
-          <p:cNvSpPr/>
-          <p:nvPr/>
-        </p:nvSpPr>
-        <p:spPr>
-          <a:xfrm>
-            <a:off x="2834640" y="4572000"/>
-            <a:ext cx="365760" cy="0"/>
-          </a:xfrm>
-          <a:prstGeom prst="line">
-            <a:avLst/>
-          </a:prstGeom>
-          <a:noFill/>
-          <a:ln w="31750">
-            <a:solidFill>
-              <a:srgbClr val="E8C547"/>
-            </a:solidFill>
-            <a:prstDash val="solid"/>
-          </a:ln>
-        </p:spPr>
-        <p:txBody>
-          <a:bodyPr/>
-          <a:lstStyle/>
-          <a:p>
-            <a:endParaRPr lang="de-CH"/>
-          </a:p>
-        </p:txBody>
-      </p:sp>
-      <p:sp>
-        <p:nvSpPr>
-          <p:cNvPr id="37" name="Shape 35"/>
-          <p:cNvSpPr/>
-          <p:nvPr/>
-        </p:nvSpPr>
-        <p:spPr>
-          <a:xfrm>
-            <a:off x="3200400" y="4480560"/>
-            <a:ext cx="365760" cy="0"/>
-          </a:xfrm>
-          <a:prstGeom prst="line">
-            <a:avLst/>
-          </a:prstGeom>
-          <a:noFill/>
-          <a:ln w="31750">
-            <a:solidFill>
-              <a:srgbClr val="E8C547"/>
-            </a:solidFill>
-            <a:prstDash val="solid"/>
-          </a:ln>
-        </p:spPr>
-        <p:txBody>
-          <a:bodyPr/>
-          <a:lstStyle/>
-          <a:p>
-            <a:endParaRPr lang="de-CH"/>
-          </a:p>
-        </p:txBody>
-      </p:sp>
-      <p:sp>
-        <p:nvSpPr>
-          <p:cNvPr id="38" name="Shape 36"/>
-          <p:cNvSpPr/>
-          <p:nvPr/>
-        </p:nvSpPr>
-        <p:spPr>
-          <a:xfrm>
-            <a:off x="3566160" y="4297680"/>
-            <a:ext cx="365760" cy="0"/>
-          </a:xfrm>
-          <a:prstGeom prst="line">
-            <a:avLst/>
-          </a:prstGeom>
-          <a:noFill/>
-          <a:ln w="31750">
-            <a:solidFill>
-              <a:srgbClr val="E8C547"/>
-            </a:solidFill>
-            <a:prstDash val="solid"/>
-          </a:ln>
-        </p:spPr>
-        <p:txBody>
-          <a:bodyPr/>
-          <a:lstStyle/>
-          <a:p>
-            <a:endParaRPr lang="de-CH"/>
-          </a:p>
-        </p:txBody>
-      </p:sp>
-      <p:sp>
-        <p:nvSpPr>
-          <p:cNvPr id="39" name="Shape 37"/>
-          <p:cNvSpPr/>
-          <p:nvPr/>
-        </p:nvSpPr>
-        <p:spPr>
-          <a:xfrm>
-            <a:off x="3931920" y="4023360"/>
-            <a:ext cx="365760" cy="0"/>
-          </a:xfrm>
-          <a:prstGeom prst="line">
-            <a:avLst/>
-          </a:prstGeom>
-          <a:noFill/>
-          <a:ln w="31750">
-            <a:solidFill>
-              <a:srgbClr val="E8C547"/>
-            </a:solidFill>
-            <a:prstDash val="solid"/>
-          </a:ln>
-        </p:spPr>
-        <p:txBody>
-          <a:bodyPr/>
-          <a:lstStyle/>
-          <a:p>
-            <a:endParaRPr lang="de-CH"/>
-          </a:p>
-        </p:txBody>
-      </p:sp>
-      <p:sp>
-        <p:nvSpPr>
-          <p:cNvPr id="40" name="Shape 38"/>
-          <p:cNvSpPr/>
-          <p:nvPr/>
-        </p:nvSpPr>
-        <p:spPr>
-          <a:xfrm>
-            <a:off x="4297680" y="3657600"/>
-            <a:ext cx="365760" cy="0"/>
-          </a:xfrm>
-          <a:prstGeom prst="line">
-            <a:avLst/>
-          </a:prstGeom>
-          <a:noFill/>
-          <a:ln w="31750">
-            <a:solidFill>
-              <a:srgbClr val="E8C547"/>
-            </a:solidFill>
-            <a:prstDash val="solid"/>
-          </a:ln>
-        </p:spPr>
-        <p:txBody>
-          <a:bodyPr/>
-          <a:lstStyle/>
-          <a:p>
-            <a:endParaRPr lang="de-CH"/>
-          </a:p>
-        </p:txBody>
-      </p:sp>
-      <p:sp>
-        <p:nvSpPr>
-          <p:cNvPr id="41" name="Shape 39"/>
-          <p:cNvSpPr/>
-          <p:nvPr/>
-        </p:nvSpPr>
-        <p:spPr>
-          <a:xfrm>
-            <a:off x="4663440" y="3291840"/>
-            <a:ext cx="365760" cy="0"/>
-          </a:xfrm>
-          <a:prstGeom prst="line">
-            <a:avLst/>
-          </a:prstGeom>
-          <a:noFill/>
-          <a:ln w="31750">
-            <a:solidFill>
-              <a:srgbClr val="E8C547"/>
-            </a:solidFill>
-            <a:prstDash val="solid"/>
-          </a:ln>
-        </p:spPr>
-        <p:txBody>
-          <a:bodyPr/>
-          <a:lstStyle/>
-          <a:p>
-            <a:endParaRPr lang="de-CH"/>
-          </a:p>
-        </p:txBody>
-      </p:sp>
-      <p:sp>
-        <p:nvSpPr>
-          <p:cNvPr id="42" name="Shape 40"/>
-          <p:cNvSpPr/>
-          <p:nvPr/>
-        </p:nvSpPr>
-        <p:spPr>
-          <a:xfrm>
-            <a:off x="5029200" y="2926080"/>
-            <a:ext cx="365760" cy="0"/>
-          </a:xfrm>
-          <a:prstGeom prst="line">
-            <a:avLst/>
-          </a:prstGeom>
-          <a:noFill/>
-          <a:ln w="31750">
-            <a:solidFill>
-              <a:srgbClr val="E8C547"/>
-            </a:solidFill>
-            <a:prstDash val="solid"/>
-          </a:ln>
-        </p:spPr>
-        <p:txBody>
-          <a:bodyPr/>
-          <a:lstStyle/>
-          <a:p>
-            <a:endParaRPr lang="de-CH"/>
-          </a:p>
-        </p:txBody>
-      </p:sp>
-      <p:sp>
-        <p:nvSpPr>
-          <p:cNvPr id="43" name="Shape 41"/>
-          <p:cNvSpPr/>
-          <p:nvPr/>
-        </p:nvSpPr>
-        <p:spPr>
-          <a:xfrm>
-            <a:off x="3429000" y="1691640"/>
-            <a:ext cx="320040" cy="2999232"/>
-          </a:xfrm>
-          <a:prstGeom prst="rect">
-            <a:avLst/>
-          </a:prstGeom>
-          <a:solidFill>
-            <a:srgbClr val="E8C547">
-              <a:alpha val="25000"/>
-            </a:srgbClr>
-          </a:solidFill>
-          <a:ln w="12700">
-            <a:solidFill>
-              <a:srgbClr val="E8C547">
-                <a:alpha val="40000"/>
-              </a:srgbClr>
-            </a:solidFill>
-            <a:prstDash val="solid"/>
-          </a:ln>
-        </p:spPr>
-        <p:txBody>
-          <a:bodyPr/>
-          <a:lstStyle/>
-          <a:p>
-            <a:endParaRPr lang="de-CH"/>
-          </a:p>
-        </p:txBody>
-      </p:sp>
-      <p:sp>
-        <p:nvSpPr>
-          <p:cNvPr id="44" name="Text 42"/>
-          <p:cNvSpPr/>
-          <p:nvPr/>
-        </p:nvSpPr>
-        <p:spPr>
-          <a:xfrm>
-            <a:off x="3319272" y="4315968"/>
-            <a:ext cx="548640" cy="320040"/>
+          <p:cNvPr id="70" name="Text 68"/>
+          <p:cNvSpPr/>
+          <p:nvPr/>
+        </p:nvSpPr>
+        <p:spPr>
+          <a:xfrm>
+            <a:off x="6263640" y="4398264"/>
+            <a:ext cx="2423160" cy="475488"/>
           </a:xfrm>
           <a:prstGeom prst="rect">
             <a:avLst/>
@@ -3811,380 +3097,47 @@
               <a:buNone/>
             </a:pPr>
             <a:r>
-              <a:rPr lang="en-US" sz="700" dirty="0">
+              <a:rPr lang="en-US" sz="1100" b="1" dirty="0">
                 <a:solidFill>
                   <a:srgbClr val="E8C547"/>
                 </a:solidFill>
               </a:rPr>
-              <a:t>Kargil</a:t>
-            </a:r>
-            <a:endParaRPr lang="en-US" sz="700" dirty="0"/>
-          </a:p>
-          <a:p>
-            <a:pPr marL="0" indent="0" algn="ctr">
-              <a:buNone/>
-            </a:pPr>
-            <a:r>
-              <a:rPr lang="en-US" sz="700" dirty="0">
-                <a:solidFill>
-                  <a:srgbClr val="E8C547"/>
-                </a:solidFill>
-              </a:rPr>
-              <a:t>1999</a:t>
-            </a:r>
-            <a:endParaRPr lang="en-US" sz="700" dirty="0"/>
-          </a:p>
-        </p:txBody>
-      </p:sp>
-      <p:sp>
-        <p:nvSpPr>
-          <p:cNvPr id="45" name="Shape 43"/>
-          <p:cNvSpPr/>
-          <p:nvPr/>
-        </p:nvSpPr>
-        <p:spPr>
-          <a:xfrm>
-            <a:off x="914400" y="4572000"/>
-            <a:ext cx="320040" cy="0"/>
-          </a:xfrm>
-          <a:prstGeom prst="line">
-            <a:avLst/>
-          </a:prstGeom>
-          <a:noFill/>
-          <a:ln w="25400">
-            <a:solidFill>
-              <a:srgbClr val="1B998B"/>
-            </a:solidFill>
-            <a:prstDash val="solid"/>
-          </a:ln>
-        </p:spPr>
-        <p:txBody>
-          <a:bodyPr/>
-          <a:lstStyle/>
-          <a:p>
-            <a:endParaRPr lang="de-CH"/>
-          </a:p>
-        </p:txBody>
-      </p:sp>
-      <p:sp>
-        <p:nvSpPr>
-          <p:cNvPr id="46" name="Text 44"/>
-          <p:cNvSpPr/>
-          <p:nvPr/>
-        </p:nvSpPr>
-        <p:spPr>
-          <a:xfrm>
-            <a:off x="1280160" y="4507992"/>
-            <a:ext cx="1280160" cy="228600"/>
-          </a:xfrm>
-          <a:prstGeom prst="rect">
-            <a:avLst/>
-          </a:prstGeom>
-          <a:noFill/>
-          <a:ln/>
-        </p:spPr>
-        <p:txBody>
-          <a:bodyPr wrap="square" rtlCol="0" anchor="ctr"/>
-          <a:lstStyle/>
-          <a:p>
-            <a:pPr marL="0" indent="0">
-              <a:buNone/>
-            </a:pPr>
-            <a:r>
-              <a:rPr lang="en-US" sz="900" dirty="0">
-                <a:solidFill>
-                  <a:srgbClr val="1B998B"/>
-                </a:solidFill>
-              </a:rPr>
-              <a:t>India mil. exp.</a:t>
-            </a:r>
-            <a:endParaRPr lang="en-US" sz="900" dirty="0"/>
-          </a:p>
-        </p:txBody>
-      </p:sp>
-      <p:sp>
-        <p:nvSpPr>
-          <p:cNvPr id="47" name="Shape 45"/>
-          <p:cNvSpPr/>
-          <p:nvPr/>
-        </p:nvSpPr>
-        <p:spPr>
-          <a:xfrm>
-            <a:off x="2651760" y="4572000"/>
-            <a:ext cx="320040" cy="0"/>
-          </a:xfrm>
-          <a:prstGeom prst="line">
-            <a:avLst/>
-          </a:prstGeom>
-          <a:noFill/>
-          <a:ln w="25400">
-            <a:solidFill>
-              <a:srgbClr val="7B9EBE"/>
-            </a:solidFill>
-            <a:prstDash val="solid"/>
-          </a:ln>
-        </p:spPr>
-        <p:txBody>
-          <a:bodyPr/>
-          <a:lstStyle/>
-          <a:p>
-            <a:endParaRPr lang="de-CH"/>
-          </a:p>
-        </p:txBody>
-      </p:sp>
-      <p:sp>
-        <p:nvSpPr>
-          <p:cNvPr id="48" name="Text 46"/>
-          <p:cNvSpPr/>
-          <p:nvPr/>
-        </p:nvSpPr>
-        <p:spPr>
-          <a:xfrm>
-            <a:off x="3017520" y="4507992"/>
-            <a:ext cx="1371600" cy="228600"/>
-          </a:xfrm>
-          <a:prstGeom prst="rect">
-            <a:avLst/>
-          </a:prstGeom>
-          <a:noFill/>
-          <a:ln/>
-        </p:spPr>
-        <p:txBody>
-          <a:bodyPr wrap="square" rtlCol="0" anchor="ctr"/>
-          <a:lstStyle/>
-          <a:p>
-            <a:pPr marL="0" indent="0">
-              <a:buNone/>
-            </a:pPr>
-            <a:r>
-              <a:rPr lang="en-US" sz="900" dirty="0">
-                <a:solidFill>
-                  <a:srgbClr val="7B9EBE"/>
-                </a:solidFill>
-              </a:rPr>
-              <a:t>Pakistan mil. exp.</a:t>
-            </a:r>
-            <a:endParaRPr lang="en-US" sz="900" dirty="0"/>
-          </a:p>
-        </p:txBody>
-      </p:sp>
-      <p:sp>
-        <p:nvSpPr>
-          <p:cNvPr id="49" name="Shape 47"/>
-          <p:cNvSpPr/>
-          <p:nvPr/>
-        </p:nvSpPr>
-        <p:spPr>
-          <a:xfrm>
-            <a:off x="4480560" y="4572000"/>
-            <a:ext cx="320040" cy="0"/>
-          </a:xfrm>
-          <a:prstGeom prst="line">
-            <a:avLst/>
-          </a:prstGeom>
-          <a:noFill/>
-          <a:ln w="25400">
-            <a:solidFill>
-              <a:srgbClr val="E8C547"/>
-            </a:solidFill>
-            <a:prstDash val="solid"/>
-          </a:ln>
-        </p:spPr>
-        <p:txBody>
-          <a:bodyPr/>
-          <a:lstStyle/>
-          <a:p>
-            <a:endParaRPr lang="de-CH"/>
-          </a:p>
-        </p:txBody>
-      </p:sp>
-      <p:sp>
-        <p:nvSpPr>
-          <p:cNvPr id="50" name="Text 48"/>
-          <p:cNvSpPr/>
-          <p:nvPr/>
-        </p:nvSpPr>
-        <p:spPr>
-          <a:xfrm>
-            <a:off x="4846320" y="4507992"/>
-            <a:ext cx="1097280" cy="228600"/>
-          </a:xfrm>
-          <a:prstGeom prst="rect">
-            <a:avLst/>
-          </a:prstGeom>
-          <a:noFill/>
-          <a:ln/>
-        </p:spPr>
-        <p:txBody>
-          <a:bodyPr wrap="square" rtlCol="0" anchor="ctr"/>
-          <a:lstStyle/>
-          <a:p>
-            <a:pPr marL="0" indent="0">
-              <a:buNone/>
-            </a:pPr>
-            <a:r>
-              <a:rPr lang="en-US" sz="900" dirty="0">
-                <a:solidFill>
-                  <a:srgbClr val="E8C547"/>
-                </a:solidFill>
-              </a:rPr>
-              <a:t>Bilateral trade</a:t>
-            </a:r>
-            <a:endParaRPr lang="en-US" sz="900" dirty="0"/>
-          </a:p>
-        </p:txBody>
-      </p:sp>
-      <p:sp>
-        <p:nvSpPr>
-          <p:cNvPr id="51" name="Shape 49"/>
-          <p:cNvSpPr/>
-          <p:nvPr/>
-        </p:nvSpPr>
-        <p:spPr>
-          <a:xfrm>
-            <a:off x="5989320" y="1280160"/>
-            <a:ext cx="2788920" cy="3474720"/>
-          </a:xfrm>
-          <a:prstGeom prst="rect">
-            <a:avLst/>
-          </a:prstGeom>
-          <a:solidFill>
-            <a:srgbClr val="FFFFFF"/>
-          </a:solidFill>
-          <a:ln w="12700">
-            <a:solidFill>
-              <a:srgbClr val="D0DBE6"/>
-            </a:solidFill>
-            <a:prstDash val="solid"/>
-          </a:ln>
-          <a:effectLst>
-            <a:outerShdw blurRad="127000" dist="38100" dir="8100000" algn="bl" rotWithShape="0">
-              <a:srgbClr val="000000">
-                <a:alpha val="18000"/>
-              </a:srgbClr>
-            </a:outerShdw>
-          </a:effectLst>
-        </p:spPr>
-        <p:txBody>
-          <a:bodyPr/>
-          <a:lstStyle/>
-          <a:p>
-            <a:endParaRPr lang="de-CH"/>
-          </a:p>
-        </p:txBody>
-      </p:sp>
-      <p:sp>
-        <p:nvSpPr>
-          <p:cNvPr id="52" name="Text 50"/>
-          <p:cNvSpPr/>
-          <p:nvPr/>
-        </p:nvSpPr>
-        <p:spPr>
-          <a:xfrm>
-            <a:off x="6172200" y="1463040"/>
-            <a:ext cx="2468880" cy="320040"/>
-          </a:xfrm>
-          <a:prstGeom prst="rect">
-            <a:avLst/>
-          </a:prstGeom>
-          <a:noFill/>
-          <a:ln/>
-        </p:spPr>
-        <p:txBody>
-          <a:bodyPr wrap="square" rtlCol="0" anchor="ctr"/>
-          <a:lstStyle/>
-          <a:p>
-            <a:pPr marL="0" indent="0">
-              <a:buNone/>
-            </a:pPr>
-            <a:r>
-              <a:rPr lang="en-US" sz="1400" b="1" dirty="0">
-                <a:solidFill>
-                  <a:srgbClr val="0D1B2A"/>
-                </a:solidFill>
-              </a:rPr>
-              <a:t>The Paradox</a:t>
-            </a:r>
-            <a:endParaRPr lang="en-US" sz="1400" dirty="0"/>
-          </a:p>
-        </p:txBody>
-      </p:sp>
-      <p:sp>
-        <p:nvSpPr>
-          <p:cNvPr id="53" name="Text 51"/>
-          <p:cNvSpPr/>
-          <p:nvPr/>
-        </p:nvSpPr>
-        <p:spPr>
-          <a:xfrm>
-            <a:off x="6172200" y="1874520"/>
-            <a:ext cx="2468880" cy="2560320"/>
-          </a:xfrm>
-          <a:prstGeom prst="rect">
-            <a:avLst/>
-          </a:prstGeom>
-          <a:noFill/>
-          <a:ln/>
-        </p:spPr>
-        <p:txBody>
-          <a:bodyPr wrap="square" rtlCol="0" anchor="ctr"/>
-          <a:lstStyle/>
-          <a:p>
-            <a:pPr marL="0" indent="0">
-              <a:buNone/>
-            </a:pPr>
-            <a:r>
-              <a:rPr lang="en-US" sz="1100" dirty="0">
-                <a:solidFill>
-                  <a:srgbClr val="3D5A73"/>
-                </a:solidFill>
-              </a:rPr>
-              <a:t>Both countries dramatically increase military spending through the 1990s — yet bilateral trade quietly starts rising from 1996 onward.</a:t>
+              <a:t>Same tool. Opposite story to Iraq.</a:t>
             </a:r>
             <a:endParaRPr lang="en-US" sz="1100" dirty="0"/>
           </a:p>
-          <a:p>
-            <a:pPr marL="0" indent="0">
-              <a:buNone/>
-            </a:pPr>
-            <a:endParaRPr lang="en-US" sz="1100" dirty="0"/>
-          </a:p>
-          <a:p>
-            <a:pPr marL="0" indent="0">
-              <a:buNone/>
-            </a:pPr>
-            <a:r>
-              <a:rPr lang="en-US" sz="1100" dirty="0">
-                <a:solidFill>
-                  <a:srgbClr val="3D5A73"/>
-                </a:solidFill>
-              </a:rPr>
-              <a:t>Even the Kargil conflict (1999) barely interrupts the trade trend.</a:t>
-            </a:r>
-            <a:endParaRPr lang="en-US" sz="1100" dirty="0"/>
-          </a:p>
-          <a:p>
-            <a:pPr marL="0" indent="0">
-              <a:buNone/>
-            </a:pPr>
-            <a:endParaRPr lang="en-US" sz="1100" dirty="0"/>
-          </a:p>
-          <a:p>
-            <a:pPr marL="0" indent="0">
-              <a:buNone/>
-            </a:pPr>
-            <a:r>
-              <a:rPr lang="en-US" sz="1100" dirty="0">
-                <a:solidFill>
-                  <a:srgbClr val="3D5A73"/>
-                </a:solidFill>
-              </a:rPr>
-              <a:t>War and commerce coexist in ways that defy simple assumptions. The data tells a more nuanced story than the headlines.</a:t>
-            </a:r>
-            <a:endParaRPr lang="en-US" sz="1100" dirty="0"/>
-          </a:p>
-        </p:txBody>
-      </p:sp>
+        </p:txBody>
+      </p:sp>
+      <p:pic>
+        <p:nvPicPr>
+          <p:cNvPr id="72" name="Grafik 71">
+            <a:extLst>
+              <a:ext uri="{FF2B5EF4-FFF2-40B4-BE49-F238E27FC236}">
+                <a16:creationId xmlns:a16="http://schemas.microsoft.com/office/drawing/2014/main" id="{034DCE76-11C4-40FA-277D-95CF0225DE4A}"/>
+              </a:ext>
+            </a:extLst>
+          </p:cNvPr>
+          <p:cNvPicPr>
+            <a:picLocks noChangeAspect="1"/>
+          </p:cNvPicPr>
+          <p:nvPr/>
+        </p:nvPicPr>
+        <p:blipFill>
+          <a:blip r:embed="rId3"/>
+          <a:stretch>
+            <a:fillRect/>
+          </a:stretch>
+        </p:blipFill>
+        <p:spPr>
+          <a:xfrm>
+            <a:off x="333628" y="1261872"/>
+            <a:ext cx="5747132" cy="3657600"/>
+          </a:xfrm>
+          <a:prstGeom prst="rect">
+            <a:avLst/>
+          </a:prstGeom>
+        </p:spPr>
+      </p:pic>
     </p:spTree>
   </p:cSld>
   <p:clrMapOvr>
@@ -5188,7 +4141,7 @@
                   <a:srgbClr val="8FA3B1"/>
                 </a:solidFill>
               </a:rPr>
-              <a:t>SIPRI starts post-WWII; COW trade goes to 1816 — triad only possible for overlapping years</a:t>
+              <a:t>SIPRI starts post-WWII; COW trade goes from 1816 to 2014 triad only possible for overlapping years</a:t>
             </a:r>
             <a:endParaRPr lang="en-US" sz="1000" dirty="0"/>
           </a:p>
@@ -5332,7 +4285,7 @@
                   <a:srgbClr val="8FA3B1"/>
                 </a:solidFill>
               </a:rPr>
-              <a:t>Gaps clearly flagged in UI — academic honesty over false completeness</a:t>
+              <a:t>Gaps clearly flagged in UI academic honesty over false completeness</a:t>
             </a:r>
             <a:endParaRPr lang="en-US" sz="1000" dirty="0"/>
           </a:p>
@@ -5580,7 +4533,20 @@
                   <a:srgbClr val="E8EDF2"/>
                 </a:solidFill>
               </a:rPr>
-              <a:t>We'd love your feedback on:  Visual encoding clarity · Navigation intuitiveness · Missing data transparency · Scope</a:t>
+              <a:t>We'd love your feedback on:  </a:t>
+            </a:r>
+          </a:p>
+          <a:p>
+            <a:pPr marL="0" indent="0" algn="ctr">
+              <a:buNone/>
+            </a:pPr>
+            <a:r>
+              <a:rPr lang="en-US" sz="1200" dirty="0">
+                <a:solidFill>
+                  <a:srgbClr val="E8EDF2"/>
+                </a:solidFill>
+              </a:rPr>
+              <a:t>Visual encoding clarity · Navigation intuitiveness · Missing data transparency</a:t>
             </a:r>
             <a:endParaRPr lang="en-US" sz="1200" dirty="0"/>
           </a:p>
@@ -5719,7 +4685,7 @@
                   <a:srgbClr val="FFFFFF"/>
                 </a:solidFill>
               </a:rPr>
-              <a:t>① TOPIC &amp; GOAL</a:t>
+              <a:t>TOPIC &amp; GOAL</a:t>
             </a:r>
             <a:endParaRPr lang="en-US" sz="900" dirty="0"/>
           </a:p>
@@ -5755,7 +4721,23 @@
                   <a:srgbClr val="0D1B2A"/>
                 </a:solidFill>
               </a:rPr>
-              <a:t>What we built — and why</a:t>
+              <a:t>What </a:t>
+            </a:r>
+            <a:r>
+              <a:rPr lang="en-US" sz="3400" b="1">
+                <a:solidFill>
+                  <a:srgbClr val="0D1B2A"/>
+                </a:solidFill>
+              </a:rPr>
+              <a:t>we built </a:t>
+            </a:r>
+            <a:r>
+              <a:rPr lang="en-US" sz="3400" b="1" dirty="0">
+                <a:solidFill>
+                  <a:srgbClr val="0D1B2A"/>
+                </a:solidFill>
+              </a:rPr>
+              <a:t>and why</a:t>
             </a:r>
             <a:endParaRPr lang="en-US" sz="3400" dirty="0"/>
           </a:p>
@@ -5904,7 +4886,7 @@
                   <a:srgbClr val="3D5A73"/>
                 </a:solidFill>
               </a:rPr>
-              <a:t>Three major datasets — historically unconnected for analysts</a:t>
+              <a:t>Three major datasets historically unconnected for analysts</a:t>
             </a:r>
             <a:endParaRPr lang="en-US" sz="1200" dirty="0"/>
           </a:p>
@@ -6174,7 +5156,7 @@
                   <a:srgbClr val="3D5A73"/>
                 </a:solidFill>
               </a:rPr>
-              <a:t>A single interactive dashboard: search by State or Conflict, filter by time, explore network and trend views — no coding required</a:t>
+              <a:t>A single interactive dashboard: search by State or Conflict, filter by time, explore network and trend views</a:t>
             </a:r>
             <a:endParaRPr lang="en-US" sz="1200" dirty="0"/>
           </a:p>
@@ -6277,7 +5259,7 @@
                   <a:srgbClr val="FFFFFF"/>
                 </a:solidFill>
               </a:rPr>
-              <a:t>② TARGET GROUP</a:t>
+              <a:t>TARGET GROUP</a:t>
             </a:r>
             <a:endParaRPr lang="en-US" sz="900" dirty="0"/>
           </a:p>
@@ -6313,7 +5295,7 @@
                   <a:srgbClr val="FFFFFF"/>
                 </a:solidFill>
               </a:rPr>
-              <a:t>One tool — two very different users</a:t>
+              <a:t>One tool - two very different users</a:t>
             </a:r>
             <a:endParaRPr lang="en-US" sz="3200" dirty="0"/>
           </a:p>
@@ -6878,7 +5860,7 @@
                   <a:srgbClr val="FFFFFF"/>
                 </a:solidFill>
               </a:rPr>
-              <a:t>③ NARRATIVE &amp; FEEDBACK</a:t>
+              <a:t>NARRATIVE &amp; FEEDBACK</a:t>
             </a:r>
             <a:endParaRPr lang="en-US" sz="900" dirty="0"/>
           </a:p>
@@ -7227,78 +6209,6 @@
       </p:sp>
       <p:sp>
         <p:nvSpPr>
-          <p:cNvPr id="13" name="Text 11"/>
-          <p:cNvSpPr/>
-          <p:nvPr/>
-        </p:nvSpPr>
-        <p:spPr>
-          <a:xfrm>
-            <a:off x="640080" y="4133088"/>
-            <a:ext cx="3749040" cy="256032"/>
-          </a:xfrm>
-          <a:prstGeom prst="rect">
-            <a:avLst/>
-          </a:prstGeom>
-          <a:noFill/>
-          <a:ln/>
-        </p:spPr>
-        <p:txBody>
-          <a:bodyPr wrap="square" rtlCol="0" anchor="ctr"/>
-          <a:lstStyle/>
-          <a:p>
-            <a:pPr marL="0" indent="0">
-              <a:buNone/>
-            </a:pPr>
-            <a:r>
-              <a:rPr lang="en-US" sz="1200" b="1" dirty="0">
-                <a:solidFill>
-                  <a:srgbClr val="0D1B2A"/>
-                </a:solidFill>
-              </a:rPr>
-              <a:t>💡 Rhetorical Contrast</a:t>
-            </a:r>
-            <a:endParaRPr lang="en-US" sz="1200" dirty="0"/>
-          </a:p>
-        </p:txBody>
-      </p:sp>
-      <p:sp>
-        <p:nvSpPr>
-          <p:cNvPr id="14" name="Text 12"/>
-          <p:cNvSpPr/>
-          <p:nvPr/>
-        </p:nvSpPr>
-        <p:spPr>
-          <a:xfrm>
-            <a:off x="640080" y="4389120"/>
-            <a:ext cx="3749040" cy="347472"/>
-          </a:xfrm>
-          <a:prstGeom prst="rect">
-            <a:avLst/>
-          </a:prstGeom>
-          <a:noFill/>
-          <a:ln/>
-        </p:spPr>
-        <p:txBody>
-          <a:bodyPr wrap="square" rtlCol="0" anchor="ctr"/>
-          <a:lstStyle/>
-          <a:p>
-            <a:pPr marL="0" indent="0">
-              <a:buNone/>
-            </a:pPr>
-            <a:r>
-              <a:rPr lang="en-US" sz="1100" dirty="0">
-                <a:solidFill>
-                  <a:srgbClr val="4A6572"/>
-                </a:solidFill>
-              </a:rPr>
-              <a:t>Expected vs. actual data — the surprise is the argument</a:t>
-            </a:r>
-            <a:endParaRPr lang="en-US" sz="1100" dirty="0"/>
-          </a:p>
-        </p:txBody>
-      </p:sp>
-      <p:sp>
-        <p:nvSpPr>
           <p:cNvPr id="15" name="Shape 13"/>
           <p:cNvSpPr/>
           <p:nvPr/>
@@ -7583,78 +6493,6 @@
                 </a:solidFill>
               </a:rPr>
               <a:t>Are gaps in the data handled transparently enough for academic use?</a:t>
-            </a:r>
-            <a:endParaRPr lang="en-US" sz="1100" dirty="0"/>
-          </a:p>
-        </p:txBody>
-      </p:sp>
-      <p:sp>
-        <p:nvSpPr>
-          <p:cNvPr id="23" name="Text 21"/>
-          <p:cNvSpPr/>
-          <p:nvPr/>
-        </p:nvSpPr>
-        <p:spPr>
-          <a:xfrm>
-            <a:off x="4937760" y="4114800"/>
-            <a:ext cx="3566160" cy="256032"/>
-          </a:xfrm>
-          <a:prstGeom prst="rect">
-            <a:avLst/>
-          </a:prstGeom>
-          <a:noFill/>
-          <a:ln/>
-        </p:spPr>
-        <p:txBody>
-          <a:bodyPr wrap="square" rtlCol="0" anchor="ctr"/>
-          <a:lstStyle/>
-          <a:p>
-            <a:pPr marL="0" indent="0">
-              <a:buNone/>
-            </a:pPr>
-            <a:r>
-              <a:rPr lang="en-US" sz="1200" b="1" dirty="0">
-                <a:solidFill>
-                  <a:srgbClr val="1B998B"/>
-                </a:solidFill>
-              </a:rPr>
-              <a:t>④ Scope</a:t>
-            </a:r>
-            <a:endParaRPr lang="en-US" sz="1200" dirty="0"/>
-          </a:p>
-        </p:txBody>
-      </p:sp>
-      <p:sp>
-        <p:nvSpPr>
-          <p:cNvPr id="24" name="Text 22"/>
-          <p:cNvSpPr/>
-          <p:nvPr/>
-        </p:nvSpPr>
-        <p:spPr>
-          <a:xfrm>
-            <a:off x="4937760" y="4370832"/>
-            <a:ext cx="3566160" cy="347472"/>
-          </a:xfrm>
-          <a:prstGeom prst="rect">
-            <a:avLst/>
-          </a:prstGeom>
-          <a:noFill/>
-          <a:ln/>
-        </p:spPr>
-        <p:txBody>
-          <a:bodyPr wrap="square" rtlCol="0" anchor="ctr"/>
-          <a:lstStyle/>
-          <a:p>
-            <a:pPr marL="0" indent="0">
-              <a:buNone/>
-            </a:pPr>
-            <a:r>
-              <a:rPr lang="en-US" sz="1100" dirty="0">
-                <a:solidFill>
-                  <a:srgbClr val="8FA3B1"/>
-                </a:solidFill>
-              </a:rPr>
-              <a:t>Are there obvious conflict/country pairs we should have showcased?</a:t>
             </a:r>
             <a:endParaRPr lang="en-US" sz="1100" dirty="0"/>
           </a:p>
@@ -7843,7 +6681,7 @@
                   <a:srgbClr val="8FA3B1"/>
                 </a:solidFill>
               </a:rPr>
-              <a:t>Three major academic datasets — all public, all separate, none designed to talk to each other.</a:t>
+              <a:t>Three major academic datasets - all public, all separate, none designed to talk to each other.</a:t>
             </a:r>
             <a:endParaRPr lang="en-US" sz="1400" dirty="0"/>
           </a:p>
@@ -8115,7 +6953,7 @@
                   <a:srgbClr val="8FA3B1"/>
                 </a:solidFill>
               </a:rPr>
-              <a:t>Every interstate war 1816→</a:t>
+              <a:t>Every interstate war since 1816</a:t>
             </a:r>
             <a:endParaRPr lang="en-US" sz="1000" dirty="0"/>
           </a:p>
@@ -8913,6 +7751,37 @@
           <a:chExt cx="0" cy="0"/>
         </a:xfrm>
       </p:grpSpPr>
+      <p:pic>
+        <p:nvPicPr>
+          <p:cNvPr id="28" name="Grafik 27">
+            <a:extLst>
+              <a:ext uri="{FF2B5EF4-FFF2-40B4-BE49-F238E27FC236}">
+                <a16:creationId xmlns:a16="http://schemas.microsoft.com/office/drawing/2014/main" id="{E16097E3-9652-80BD-47A3-831ABE1709F8}"/>
+              </a:ext>
+            </a:extLst>
+          </p:cNvPr>
+          <p:cNvPicPr>
+            <a:picLocks noChangeAspect="1"/>
+          </p:cNvPicPr>
+          <p:nvPr/>
+        </p:nvPicPr>
+        <p:blipFill>
+          <a:blip r:embed="rId3"/>
+          <a:srcRect r="4089"/>
+          <a:stretch>
+            <a:fillRect/>
+          </a:stretch>
+        </p:blipFill>
+        <p:spPr>
+          <a:xfrm>
+            <a:off x="411480" y="1389888"/>
+            <a:ext cx="5683834" cy="2294474"/>
+          </a:xfrm>
+          <a:prstGeom prst="rect">
+            <a:avLst/>
+          </a:prstGeom>
+        </p:spPr>
+      </p:pic>
       <p:sp>
         <p:nvSpPr>
           <p:cNvPr id="2" name="Shape 0"/>
@@ -9019,37 +7888,6 @@
           </a:p>
         </p:txBody>
       </p:sp>
-      <p:pic>
-        <p:nvPicPr>
-          <p:cNvPr id="5" name="Image 0" descr="preencoded.png"/>
-          <p:cNvPicPr>
-            <a:picLocks noChangeAspect="1"/>
-          </p:cNvPicPr>
-          <p:nvPr/>
-        </p:nvPicPr>
-        <p:blipFill>
-          <a:blip r:embed="rId3"/>
-          <a:stretch>
-            <a:fillRect/>
-          </a:stretch>
-        </p:blipFill>
-        <p:spPr>
-          <a:xfrm>
-            <a:off x="411480" y="1261872"/>
-            <a:ext cx="5669280" cy="2578608"/>
-          </a:xfrm>
-          <a:prstGeom prst="rect">
-            <a:avLst/>
-          </a:prstGeom>
-          <a:effectLst>
-            <a:outerShdw blurRad="127000" dist="38100" dir="8100000" algn="bl" rotWithShape="0">
-              <a:srgbClr val="000000">
-                <a:alpha val="18000"/>
-              </a:srgbClr>
-            </a:outerShdw>
-          </a:effectLst>
-        </p:spPr>
-      </p:pic>
       <p:sp>
         <p:nvSpPr>
           <p:cNvPr id="6" name="Shape 3"/>
@@ -9435,7 +8273,7 @@
                   <a:srgbClr val="FFFFFF"/>
                 </a:solidFill>
               </a:rPr>
-              <a:t>Set State B = USA</a:t>
+              <a:t>Set State B = KWT</a:t>
             </a:r>
             <a:endParaRPr lang="en-US" sz="1100" dirty="0"/>
           </a:p>
@@ -9719,7 +8557,7 @@
                   <a:srgbClr val="FFFFFF"/>
                 </a:solidFill>
               </a:rPr>
-              <a:t>Pick Conflict #3552</a:t>
+              <a:t>Pick Conflict #3982</a:t>
             </a:r>
             <a:endParaRPr lang="en-US" sz="1100" dirty="0"/>
           </a:p>
@@ -9755,7 +8593,20 @@
                   <a:srgbClr val="8FA3B1"/>
                 </a:solidFill>
               </a:rPr>
-              <a:t>The table shows IDs — Marco picks the 1992–93 entry</a:t>
+              <a:t>The table shows IDs </a:t>
+            </a:r>
+          </a:p>
+          <a:p>
+            <a:pPr marL="0" indent="0">
+              <a:buNone/>
+            </a:pPr>
+            <a:r>
+              <a:rPr lang="en-US" sz="1000" dirty="0">
+                <a:solidFill>
+                  <a:srgbClr val="8FA3B1"/>
+                </a:solidFill>
+              </a:rPr>
+              <a:t>Marco picks the 1991 entry</a:t>
             </a:r>
             <a:endParaRPr lang="en-US" sz="1000" dirty="0"/>
           </a:p>
@@ -9769,8 +8620,8 @@
         </p:nvSpPr>
         <p:spPr>
           <a:xfrm>
-            <a:off x="457200" y="1408176"/>
-            <a:ext cx="2560320" cy="965076"/>
+            <a:off x="457200" y="1325880"/>
+            <a:ext cx="2560320" cy="822960"/>
           </a:xfrm>
           <a:prstGeom prst="rect">
             <a:avLst/>
@@ -9964,43 +8815,12 @@
                   <a:srgbClr val="FFFFFF"/>
                 </a:solidFill>
               </a:rPr>
-              <a:t>Step 2: Enter Conflict ID 3552</a:t>
+              <a:t>Step 2: Enter Conflict ID 3982</a:t>
             </a:r>
             <a:endParaRPr lang="en-US" sz="2800" dirty="0"/>
           </a:p>
         </p:txBody>
       </p:sp>
-      <p:pic>
-        <p:nvPicPr>
-          <p:cNvPr id="5" name="Image 0" descr="preencoded.png"/>
-          <p:cNvPicPr>
-            <a:picLocks noChangeAspect="1"/>
-          </p:cNvPicPr>
-          <p:nvPr/>
-        </p:nvPicPr>
-        <p:blipFill>
-          <a:blip r:embed="rId3"/>
-          <a:stretch>
-            <a:fillRect/>
-          </a:stretch>
-        </p:blipFill>
-        <p:spPr>
-          <a:xfrm>
-            <a:off x="411480" y="1097280"/>
-            <a:ext cx="5303520" cy="3822192"/>
-          </a:xfrm>
-          <a:prstGeom prst="rect">
-            <a:avLst/>
-          </a:prstGeom>
-          <a:effectLst>
-            <a:outerShdw blurRad="127000" dist="38100" dir="8100000" algn="bl" rotWithShape="0">
-              <a:srgbClr val="000000">
-                <a:alpha val="18000"/>
-              </a:srgbClr>
-            </a:outerShdw>
-          </a:effectLst>
-        </p:spPr>
-      </p:pic>
       <p:sp>
         <p:nvSpPr>
           <p:cNvPr id="6" name="Shape 3"/>
@@ -10142,7 +8962,7 @@
                   <a:srgbClr val="8FA3B1"/>
                 </a:solidFill>
               </a:rPr>
-              <a:t>The two belligerents shown geographically — instant orientation</a:t>
+              <a:t>The two belligerents shown geographically instant orientation</a:t>
             </a:r>
             <a:endParaRPr lang="en-US" sz="1000" dirty="0"/>
           </a:p>
@@ -10178,7 +8998,7 @@
                   <a:srgbClr val="1B998B"/>
                 </a:solidFill>
               </a:rPr>
-              <a:t>▸ Duration: 1992–1993</a:t>
+              <a:t>▸ Duration: 1 Year in 1991</a:t>
             </a:r>
             <a:endParaRPr lang="en-US" sz="1100" dirty="0"/>
           </a:p>
@@ -10205,16 +9025,13 @@
           <a:bodyPr wrap="square" rtlCol="0" anchor="ctr"/>
           <a:lstStyle/>
           <a:p>
-            <a:pPr marL="0" indent="0">
-              <a:buNone/>
-            </a:pPr>
             <a:r>
               <a:rPr lang="en-US" sz="1000" dirty="0">
                 <a:solidFill>
                   <a:srgbClr val="8FA3B1"/>
                 </a:solidFill>
               </a:rPr>
-              <a:t>Post-Gulf War standoff, not the war itself — Kuwait vs. Iraq</a:t>
+              <a:t>Operation Desert storm liberation of Kuwait through US led coalition</a:t>
             </a:r>
             <a:endParaRPr lang="en-US" sz="1000" dirty="0"/>
           </a:p>
@@ -10286,7 +9103,7 @@
                   <a:srgbClr val="8FA3B1"/>
                 </a:solidFill>
               </a:rPr>
-              <a:t>No decisive resolution, conflict severity 75/100</a:t>
+              <a:t>No decisive resolution, conflict severity 65/100</a:t>
             </a:r>
             <a:endParaRPr lang="en-US" sz="1000" dirty="0"/>
           </a:p>
@@ -10364,6 +9181,36 @@
           </a:p>
         </p:txBody>
       </p:sp>
+      <p:pic>
+        <p:nvPicPr>
+          <p:cNvPr id="17" name="Grafik 16">
+            <a:extLst>
+              <a:ext uri="{FF2B5EF4-FFF2-40B4-BE49-F238E27FC236}">
+                <a16:creationId xmlns:a16="http://schemas.microsoft.com/office/drawing/2014/main" id="{83BACE97-E9D5-B9D2-C398-3B14F5A6E7D3}"/>
+              </a:ext>
+            </a:extLst>
+          </p:cNvPr>
+          <p:cNvPicPr>
+            <a:picLocks noChangeAspect="1"/>
+          </p:cNvPicPr>
+          <p:nvPr/>
+        </p:nvPicPr>
+        <p:blipFill>
+          <a:blip r:embed="rId3"/>
+          <a:stretch>
+            <a:fillRect/>
+          </a:stretch>
+        </p:blipFill>
+        <p:spPr>
+          <a:xfrm>
+            <a:off x="457200" y="1082901"/>
+            <a:ext cx="5135596" cy="3853324"/>
+          </a:xfrm>
+          <a:prstGeom prst="rect">
+            <a:avLst/>
+          </a:prstGeom>
+        </p:spPr>
+      </p:pic>
     </p:spTree>
   </p:cSld>
   <p:clrMapOvr>
@@ -10497,43 +9344,12 @@
                   <a:srgbClr val="0D1B2A"/>
                 </a:solidFill>
               </a:rPr>
-              <a:t>The trade drops to zero — and never recovers</a:t>
+              <a:t>The trade drops to zero and never recovers</a:t>
             </a:r>
             <a:endParaRPr lang="en-US" sz="2600" dirty="0"/>
           </a:p>
         </p:txBody>
       </p:sp>
-      <p:pic>
-        <p:nvPicPr>
-          <p:cNvPr id="5" name="Image 0" descr="preencoded.png"/>
-          <p:cNvPicPr>
-            <a:picLocks noChangeAspect="1"/>
-          </p:cNvPicPr>
-          <p:nvPr/>
-        </p:nvPicPr>
-        <p:blipFill>
-          <a:blip r:embed="rId3"/>
-          <a:stretch>
-            <a:fillRect/>
-          </a:stretch>
-        </p:blipFill>
-        <p:spPr>
-          <a:xfrm>
-            <a:off x="411480" y="1234440"/>
-            <a:ext cx="5760720" cy="3703320"/>
-          </a:xfrm>
-          <a:prstGeom prst="rect">
-            <a:avLst/>
-          </a:prstGeom>
-          <a:effectLst>
-            <a:outerShdw blurRad="127000" dist="38100" dir="8100000" algn="bl" rotWithShape="0">
-              <a:srgbClr val="000000">
-                <a:alpha val="18000"/>
-              </a:srgbClr>
-            </a:outerShdw>
-          </a:effectLst>
-        </p:spPr>
-      </p:pic>
       <p:sp>
         <p:nvSpPr>
           <p:cNvPr id="6" name="Shape 3"/>
@@ -10542,8 +9358,8 @@
         </p:nvSpPr>
         <p:spPr>
           <a:xfrm>
-            <a:off x="3643639" y="3452209"/>
-            <a:ext cx="2182693" cy="400835"/>
+            <a:off x="3742757" y="3437760"/>
+            <a:ext cx="2286000" cy="457200"/>
           </a:xfrm>
           <a:prstGeom prst="rect">
             <a:avLst/>
@@ -10564,7 +9380,7 @@
           <a:bodyPr/>
           <a:lstStyle/>
           <a:p>
-            <a:endParaRPr lang="de-CH"/>
+            <a:endParaRPr lang="de-CH" dirty="0"/>
           </a:p>
         </p:txBody>
       </p:sp>
@@ -10576,8 +9392,8 @@
         </p:nvSpPr>
         <p:spPr>
           <a:xfrm>
-            <a:off x="3685227" y="3479641"/>
-            <a:ext cx="2095385" cy="240501"/>
+            <a:off x="3788477" y="3465192"/>
+            <a:ext cx="2194560" cy="274320"/>
           </a:xfrm>
           <a:prstGeom prst="rect">
             <a:avLst/>
@@ -10704,12 +9520,20 @@
               <a:buNone/>
             </a:pPr>
             <a:r>
+              <a:rPr lang="en-US" sz="1100" dirty="0" err="1">
+                <a:solidFill>
+                  <a:srgbClr val="8FA3B1"/>
+                </a:solidFill>
+              </a:rPr>
+              <a:t>Kuwaits</a:t>
+            </a:r>
+            <a:r>
               <a:rPr lang="en-US" sz="1100" dirty="0">
                 <a:solidFill>
                   <a:srgbClr val="8FA3B1"/>
                 </a:solidFill>
               </a:rPr>
-              <a:t>Iraq's military expenditure peaks sharply just before the conflict, then collapses.</a:t>
+              <a:t> military expenditure peaks during the conflict</a:t>
             </a:r>
             <a:endParaRPr lang="en-US" sz="1100" dirty="0"/>
           </a:p>
@@ -10729,7 +9553,20 @@
                   <a:srgbClr val="8FA3B1"/>
                 </a:solidFill>
               </a:rPr>
-              <a:t>Kuwait–Iraq trade hits zero in 1991 and flatlines permanently — not a dip, a permanent break.</a:t>
+              <a:t>Kuwait-Iraq trade hits zero in 1991 and flatlines permanently</a:t>
+            </a:r>
+          </a:p>
+          <a:p>
+            <a:pPr marL="0" indent="0">
+              <a:buNone/>
+            </a:pPr>
+            <a:r>
+              <a:rPr lang="en-US" sz="1100" dirty="0">
+                <a:solidFill>
+                  <a:srgbClr val="8FA3B1"/>
+                </a:solidFill>
+              </a:rPr>
+              <a:t>not a dip, a permanent break.</a:t>
             </a:r>
             <a:endParaRPr lang="en-US" sz="1100" dirty="0"/>
           </a:p>
@@ -10749,7 +9586,7 @@
                   <a:srgbClr val="8FA3B1"/>
                 </a:solidFill>
               </a:rPr>
-              <a:t>The red shading makes the conflict period unmissable.</a:t>
+              <a:t>The red line makes the conflict period unmissable.</a:t>
             </a:r>
             <a:endParaRPr lang="en-US" sz="1100" dirty="0"/>
           </a:p>
@@ -10843,6 +9680,36 @@
           </a:p>
         </p:txBody>
       </p:sp>
+      <p:pic>
+        <p:nvPicPr>
+          <p:cNvPr id="14" name="Grafik 13">
+            <a:extLst>
+              <a:ext uri="{FF2B5EF4-FFF2-40B4-BE49-F238E27FC236}">
+                <a16:creationId xmlns:a16="http://schemas.microsoft.com/office/drawing/2014/main" id="{EA188024-4418-8827-E8F3-11584A4DE1B8}"/>
+              </a:ext>
+            </a:extLst>
+          </p:cNvPr>
+          <p:cNvPicPr>
+            <a:picLocks noChangeAspect="1"/>
+          </p:cNvPicPr>
+          <p:nvPr/>
+        </p:nvPicPr>
+        <p:blipFill>
+          <a:blip r:embed="rId3"/>
+          <a:stretch>
+            <a:fillRect/>
+          </a:stretch>
+        </p:blipFill>
+        <p:spPr>
+          <a:xfrm>
+            <a:off x="365760" y="1245678"/>
+            <a:ext cx="5880259" cy="3692082"/>
+          </a:xfrm>
+          <a:prstGeom prst="rect">
+            <a:avLst/>
+          </a:prstGeom>
+        </p:spPr>
+      </p:pic>
     </p:spTree>
   </p:cSld>
   <p:clrMapOvr>
